--- a/JAROOS_Minimalist_Presentation.pptx
+++ b/JAROOS_Minimalist_Presentation.pptx
@@ -5,23 +5,23 @@
     <p:sldMasterId id="2147483648" r:id="rId1"/>
   </p:sldMasterIdLst>
   <p:sldIdLst>
-    <p:sldId id="256" r:id="rId2"/>
-    <p:sldId id="257" r:id="rId3"/>
-    <p:sldId id="258" r:id="rId4"/>
-    <p:sldId id="259" r:id="rId5"/>
-    <p:sldId id="260" r:id="rId6"/>
-    <p:sldId id="261" r:id="rId7"/>
-    <p:sldId id="262" r:id="rId8"/>
-    <p:sldId id="263" r:id="rId9"/>
-    <p:sldId id="264" r:id="rId10"/>
-    <p:sldId id="265" r:id="rId11"/>
-    <p:sldId id="266" r:id="rId12"/>
-    <p:sldId id="267" r:id="rId13"/>
-    <p:sldId id="268" r:id="rId14"/>
-    <p:sldId id="269" r:id="rId15"/>
-    <p:sldId id="270" r:id="rId16"/>
+    <p:sldId id="256" r:id="rId7"/>
+    <p:sldId id="257" r:id="rId8"/>
+    <p:sldId id="258" r:id="rId9"/>
+    <p:sldId id="259" r:id="rId10"/>
+    <p:sldId id="260" r:id="rId11"/>
+    <p:sldId id="261" r:id="rId12"/>
+    <p:sldId id="262" r:id="rId13"/>
+    <p:sldId id="263" r:id="rId14"/>
+    <p:sldId id="264" r:id="rId15"/>
+    <p:sldId id="265" r:id="rId16"/>
+    <p:sldId id="266" r:id="rId17"/>
+    <p:sldId id="267" r:id="rId18"/>
+    <p:sldId id="268" r:id="rId19"/>
+    <p:sldId id="269" r:id="rId20"/>
+    <p:sldId id="270" r:id="rId21"/>
   </p:sldIdLst>
-  <p:sldSz cx="12192000" cy="6858000"/>
+  <p:sldSz cx="12191695" cy="6858000" type="screen4x3"/>
   <p:notesSz cx="6858000" cy="9144000"/>
   <p:defaultTextStyle>
     <a:defPPr>
@@ -118,22 +118,6 @@
       </a:defRPr>
     </a:lvl9pPr>
   </p:defaultTextStyle>
-  <p:extLst>
-    <p:ext uri="{EFAFB233-063F-42B5-8137-9DF3F51BA10A}">
-      <p15:sldGuideLst xmlns:p15="http://schemas.microsoft.com/office/powerpoint/2012/main">
-        <p15:guide id="1" orient="horz" pos="2160">
-          <p15:clr>
-            <a:srgbClr val="A4A3A4"/>
-          </p15:clr>
-        </p15:guide>
-        <p15:guide id="2" pos="2880">
-          <p15:clr>
-            <a:srgbClr val="A4A3A4"/>
-          </p15:clr>
-        </p15:guide>
-      </p15:sldGuideLst>
-    </p:ext>
-  </p:extLst>
 </p:presentation>
 </file>
 
@@ -175,9 +159,10 @@
           <a:lstStyle/>
           <a:p>
             <a:r>
-              <a:rPr lang="en-US"/>
+              <a:rPr lang="en-US" smtClean="0"/>
               <a:t>Click to edit Master title style</a:t>
             </a:r>
+            <a:endParaRPr lang="en-US"/>
           </a:p>
         </p:txBody>
       </p:sp>
@@ -293,9 +278,10 @@
           </a:lstStyle>
           <a:p>
             <a:r>
-              <a:rPr lang="en-US"/>
+              <a:rPr lang="en-US" smtClean="0"/>
               <a:t>Click to edit Master subtitle style</a:t>
             </a:r>
+            <a:endParaRPr lang="en-US"/>
           </a:p>
         </p:txBody>
       </p:sp>
@@ -316,7 +302,7 @@
           <a:p>
             <a:fld id="{5BCAD085-E8A6-8845-BD4E-CB4CCA059FC4}" type="datetimeFigureOut">
               <a:rPr lang="en-US" smtClean="0"/>
-              <a:t>9/15/2026</a:t>
+              <a:t>1/27/13</a:t>
             </a:fld>
             <a:endParaRPr lang="en-US"/>
           </a:p>
@@ -410,9 +396,10 @@
           <a:lstStyle/>
           <a:p>
             <a:r>
-              <a:rPr lang="en-US"/>
+              <a:rPr lang="en-US" smtClean="0"/>
               <a:t>Click to edit Master title style</a:t>
             </a:r>
+            <a:endParaRPr lang="en-US"/>
           </a:p>
         </p:txBody>
       </p:sp>
@@ -433,37 +420,38 @@
           <a:p>
             <a:pPr lvl="0"/>
             <a:r>
-              <a:rPr lang="en-US"/>
+              <a:rPr lang="en-US" smtClean="0"/>
               <a:t>Click to edit Master text styles</a:t>
             </a:r>
           </a:p>
           <a:p>
             <a:pPr lvl="1"/>
             <a:r>
-              <a:rPr lang="en-US"/>
+              <a:rPr lang="en-US" smtClean="0"/>
               <a:t>Second level</a:t>
             </a:r>
           </a:p>
           <a:p>
             <a:pPr lvl="2"/>
             <a:r>
-              <a:rPr lang="en-US"/>
+              <a:rPr lang="en-US" smtClean="0"/>
               <a:t>Third level</a:t>
             </a:r>
           </a:p>
           <a:p>
             <a:pPr lvl="3"/>
             <a:r>
-              <a:rPr lang="en-US"/>
+              <a:rPr lang="en-US" smtClean="0"/>
               <a:t>Fourth level</a:t>
             </a:r>
           </a:p>
           <a:p>
             <a:pPr lvl="4"/>
             <a:r>
-              <a:rPr lang="en-US"/>
+              <a:rPr lang="en-US" smtClean="0"/>
               <a:t>Fifth level</a:t>
             </a:r>
+            <a:endParaRPr lang="en-US"/>
           </a:p>
         </p:txBody>
       </p:sp>
@@ -484,7 +472,7 @@
           <a:p>
             <a:fld id="{5BCAD085-E8A6-8845-BD4E-CB4CCA059FC4}" type="datetimeFigureOut">
               <a:rPr lang="en-US" smtClean="0"/>
-              <a:t>9/15/2026</a:t>
+              <a:t>1/27/13</a:t>
             </a:fld>
             <a:endParaRPr lang="en-US"/>
           </a:p>
@@ -583,9 +571,10 @@
           <a:lstStyle/>
           <a:p>
             <a:r>
-              <a:rPr lang="en-US"/>
+              <a:rPr lang="en-US" smtClean="0"/>
               <a:t>Click to edit Master title style</a:t>
             </a:r>
+            <a:endParaRPr lang="en-US"/>
           </a:p>
         </p:txBody>
       </p:sp>
@@ -611,37 +600,38 @@
           <a:p>
             <a:pPr lvl="0"/>
             <a:r>
-              <a:rPr lang="en-US"/>
+              <a:rPr lang="en-US" smtClean="0"/>
               <a:t>Click to edit Master text styles</a:t>
             </a:r>
           </a:p>
           <a:p>
             <a:pPr lvl="1"/>
             <a:r>
-              <a:rPr lang="en-US"/>
+              <a:rPr lang="en-US" smtClean="0"/>
               <a:t>Second level</a:t>
             </a:r>
           </a:p>
           <a:p>
             <a:pPr lvl="2"/>
             <a:r>
-              <a:rPr lang="en-US"/>
+              <a:rPr lang="en-US" smtClean="0"/>
               <a:t>Third level</a:t>
             </a:r>
           </a:p>
           <a:p>
             <a:pPr lvl="3"/>
             <a:r>
-              <a:rPr lang="en-US"/>
+              <a:rPr lang="en-US" smtClean="0"/>
               <a:t>Fourth level</a:t>
             </a:r>
           </a:p>
           <a:p>
             <a:pPr lvl="4"/>
             <a:r>
-              <a:rPr lang="en-US"/>
+              <a:rPr lang="en-US" smtClean="0"/>
               <a:t>Fifth level</a:t>
             </a:r>
+            <a:endParaRPr lang="en-US"/>
           </a:p>
         </p:txBody>
       </p:sp>
@@ -662,7 +652,7 @@
           <a:p>
             <a:fld id="{5BCAD085-E8A6-8845-BD4E-CB4CCA059FC4}" type="datetimeFigureOut">
               <a:rPr lang="en-US" smtClean="0"/>
-              <a:t>9/15/2026</a:t>
+              <a:t>1/27/13</a:t>
             </a:fld>
             <a:endParaRPr lang="en-US"/>
           </a:p>
@@ -756,9 +746,10 @@
           <a:lstStyle/>
           <a:p>
             <a:r>
-              <a:rPr lang="en-US"/>
+              <a:rPr lang="en-US" smtClean="0"/>
               <a:t>Click to edit Master title style</a:t>
             </a:r>
+            <a:endParaRPr lang="en-US"/>
           </a:p>
         </p:txBody>
       </p:sp>
@@ -779,37 +770,38 @@
           <a:p>
             <a:pPr lvl="0"/>
             <a:r>
-              <a:rPr lang="en-US"/>
+              <a:rPr lang="en-US" smtClean="0"/>
               <a:t>Click to edit Master text styles</a:t>
             </a:r>
           </a:p>
           <a:p>
             <a:pPr lvl="1"/>
             <a:r>
-              <a:rPr lang="en-US"/>
+              <a:rPr lang="en-US" smtClean="0"/>
               <a:t>Second level</a:t>
             </a:r>
           </a:p>
           <a:p>
             <a:pPr lvl="2"/>
             <a:r>
-              <a:rPr lang="en-US"/>
+              <a:rPr lang="en-US" smtClean="0"/>
               <a:t>Third level</a:t>
             </a:r>
           </a:p>
           <a:p>
             <a:pPr lvl="3"/>
             <a:r>
-              <a:rPr lang="en-US"/>
+              <a:rPr lang="en-US" smtClean="0"/>
               <a:t>Fourth level</a:t>
             </a:r>
           </a:p>
           <a:p>
             <a:pPr lvl="4"/>
             <a:r>
-              <a:rPr lang="en-US"/>
+              <a:rPr lang="en-US" smtClean="0"/>
               <a:t>Fifth level</a:t>
             </a:r>
+            <a:endParaRPr lang="en-US"/>
           </a:p>
         </p:txBody>
       </p:sp>
@@ -830,7 +822,7 @@
           <a:p>
             <a:fld id="{5BCAD085-E8A6-8845-BD4E-CB4CCA059FC4}" type="datetimeFigureOut">
               <a:rPr lang="en-US" smtClean="0"/>
-              <a:t>9/15/2026</a:t>
+              <a:t>1/27/13</a:t>
             </a:fld>
             <a:endParaRPr lang="en-US"/>
           </a:p>
@@ -933,9 +925,10 @@
           </a:lstStyle>
           <a:p>
             <a:r>
-              <a:rPr lang="en-US"/>
+              <a:rPr lang="en-US" smtClean="0"/>
               <a:t>Click to edit Master title style</a:t>
             </a:r>
+            <a:endParaRPr lang="en-US"/>
           </a:p>
         </p:txBody>
       </p:sp>
@@ -1052,7 +1045,7 @@
           <a:p>
             <a:pPr lvl="0"/>
             <a:r>
-              <a:rPr lang="en-US"/>
+              <a:rPr lang="en-US" smtClean="0"/>
               <a:t>Click to edit Master text styles</a:t>
             </a:r>
           </a:p>
@@ -1075,7 +1068,7 @@
           <a:p>
             <a:fld id="{5BCAD085-E8A6-8845-BD4E-CB4CCA059FC4}" type="datetimeFigureOut">
               <a:rPr lang="en-US" smtClean="0"/>
-              <a:t>9/15/2026</a:t>
+              <a:t>1/27/13</a:t>
             </a:fld>
             <a:endParaRPr lang="en-US"/>
           </a:p>
@@ -1169,9 +1162,10 @@
           <a:lstStyle/>
           <a:p>
             <a:r>
-              <a:rPr lang="en-US"/>
+              <a:rPr lang="en-US" smtClean="0"/>
               <a:t>Click to edit Master title style</a:t>
             </a:r>
+            <a:endParaRPr lang="en-US"/>
           </a:p>
         </p:txBody>
       </p:sp>
@@ -1225,37 +1219,38 @@
           <a:p>
             <a:pPr lvl="0"/>
             <a:r>
-              <a:rPr lang="en-US"/>
+              <a:rPr lang="en-US" smtClean="0"/>
               <a:t>Click to edit Master text styles</a:t>
             </a:r>
           </a:p>
           <a:p>
             <a:pPr lvl="1"/>
             <a:r>
-              <a:rPr lang="en-US"/>
+              <a:rPr lang="en-US" smtClean="0"/>
               <a:t>Second level</a:t>
             </a:r>
           </a:p>
           <a:p>
             <a:pPr lvl="2"/>
             <a:r>
-              <a:rPr lang="en-US"/>
+              <a:rPr lang="en-US" smtClean="0"/>
               <a:t>Third level</a:t>
             </a:r>
           </a:p>
           <a:p>
             <a:pPr lvl="3"/>
             <a:r>
-              <a:rPr lang="en-US"/>
+              <a:rPr lang="en-US" smtClean="0"/>
               <a:t>Fourth level</a:t>
             </a:r>
           </a:p>
           <a:p>
             <a:pPr lvl="4"/>
             <a:r>
-              <a:rPr lang="en-US"/>
+              <a:rPr lang="en-US" smtClean="0"/>
               <a:t>Fifth level</a:t>
             </a:r>
+            <a:endParaRPr lang="en-US"/>
           </a:p>
         </p:txBody>
       </p:sp>
@@ -1309,37 +1304,38 @@
           <a:p>
             <a:pPr lvl="0"/>
             <a:r>
-              <a:rPr lang="en-US"/>
+              <a:rPr lang="en-US" smtClean="0"/>
               <a:t>Click to edit Master text styles</a:t>
             </a:r>
           </a:p>
           <a:p>
             <a:pPr lvl="1"/>
             <a:r>
-              <a:rPr lang="en-US"/>
+              <a:rPr lang="en-US" smtClean="0"/>
               <a:t>Second level</a:t>
             </a:r>
           </a:p>
           <a:p>
             <a:pPr lvl="2"/>
             <a:r>
-              <a:rPr lang="en-US"/>
+              <a:rPr lang="en-US" smtClean="0"/>
               <a:t>Third level</a:t>
             </a:r>
           </a:p>
           <a:p>
             <a:pPr lvl="3"/>
             <a:r>
-              <a:rPr lang="en-US"/>
+              <a:rPr lang="en-US" smtClean="0"/>
               <a:t>Fourth level</a:t>
             </a:r>
           </a:p>
           <a:p>
             <a:pPr lvl="4"/>
             <a:r>
-              <a:rPr lang="en-US"/>
+              <a:rPr lang="en-US" smtClean="0"/>
               <a:t>Fifth level</a:t>
             </a:r>
+            <a:endParaRPr lang="en-US"/>
           </a:p>
         </p:txBody>
       </p:sp>
@@ -1360,7 +1356,7 @@
           <a:p>
             <a:fld id="{5BCAD085-E8A6-8845-BD4E-CB4CCA059FC4}" type="datetimeFigureOut">
               <a:rPr lang="en-US" smtClean="0"/>
-              <a:t>9/15/2026</a:t>
+              <a:t>1/27/13</a:t>
             </a:fld>
             <a:endParaRPr lang="en-US"/>
           </a:p>
@@ -1458,9 +1454,10 @@
           </a:lstStyle>
           <a:p>
             <a:r>
-              <a:rPr lang="en-US"/>
+              <a:rPr lang="en-US" smtClean="0"/>
               <a:t>Click to edit Master title style</a:t>
             </a:r>
+            <a:endParaRPr lang="en-US"/>
           </a:p>
         </p:txBody>
       </p:sp>
@@ -1523,7 +1520,7 @@
           <a:p>
             <a:pPr lvl="0"/>
             <a:r>
-              <a:rPr lang="en-US"/>
+              <a:rPr lang="en-US" smtClean="0"/>
               <a:t>Click to edit Master text styles</a:t>
             </a:r>
           </a:p>
@@ -1579,37 +1576,38 @@
           <a:p>
             <a:pPr lvl="0"/>
             <a:r>
-              <a:rPr lang="en-US"/>
+              <a:rPr lang="en-US" smtClean="0"/>
               <a:t>Click to edit Master text styles</a:t>
             </a:r>
           </a:p>
           <a:p>
             <a:pPr lvl="1"/>
             <a:r>
-              <a:rPr lang="en-US"/>
+              <a:rPr lang="en-US" smtClean="0"/>
               <a:t>Second level</a:t>
             </a:r>
           </a:p>
           <a:p>
             <a:pPr lvl="2"/>
             <a:r>
-              <a:rPr lang="en-US"/>
+              <a:rPr lang="en-US" smtClean="0"/>
               <a:t>Third level</a:t>
             </a:r>
           </a:p>
           <a:p>
             <a:pPr lvl="3"/>
             <a:r>
-              <a:rPr lang="en-US"/>
+              <a:rPr lang="en-US" smtClean="0"/>
               <a:t>Fourth level</a:t>
             </a:r>
           </a:p>
           <a:p>
             <a:pPr lvl="4"/>
             <a:r>
-              <a:rPr lang="en-US"/>
+              <a:rPr lang="en-US" smtClean="0"/>
               <a:t>Fifth level</a:t>
             </a:r>
+            <a:endParaRPr lang="en-US"/>
           </a:p>
         </p:txBody>
       </p:sp>
@@ -1672,7 +1670,7 @@
           <a:p>
             <a:pPr lvl="0"/>
             <a:r>
-              <a:rPr lang="en-US"/>
+              <a:rPr lang="en-US" smtClean="0"/>
               <a:t>Click to edit Master text styles</a:t>
             </a:r>
           </a:p>
@@ -1728,37 +1726,38 @@
           <a:p>
             <a:pPr lvl="0"/>
             <a:r>
-              <a:rPr lang="en-US"/>
+              <a:rPr lang="en-US" smtClean="0"/>
               <a:t>Click to edit Master text styles</a:t>
             </a:r>
           </a:p>
           <a:p>
             <a:pPr lvl="1"/>
             <a:r>
-              <a:rPr lang="en-US"/>
+              <a:rPr lang="en-US" smtClean="0"/>
               <a:t>Second level</a:t>
             </a:r>
           </a:p>
           <a:p>
             <a:pPr lvl="2"/>
             <a:r>
-              <a:rPr lang="en-US"/>
+              <a:rPr lang="en-US" smtClean="0"/>
               <a:t>Third level</a:t>
             </a:r>
           </a:p>
           <a:p>
             <a:pPr lvl="3"/>
             <a:r>
-              <a:rPr lang="en-US"/>
+              <a:rPr lang="en-US" smtClean="0"/>
               <a:t>Fourth level</a:t>
             </a:r>
           </a:p>
           <a:p>
             <a:pPr lvl="4"/>
             <a:r>
-              <a:rPr lang="en-US"/>
+              <a:rPr lang="en-US" smtClean="0"/>
               <a:t>Fifth level</a:t>
             </a:r>
+            <a:endParaRPr lang="en-US"/>
           </a:p>
         </p:txBody>
       </p:sp>
@@ -1779,7 +1778,7 @@
           <a:p>
             <a:fld id="{5BCAD085-E8A6-8845-BD4E-CB4CCA059FC4}" type="datetimeFigureOut">
               <a:rPr lang="en-US" smtClean="0"/>
-              <a:t>9/15/2026</a:t>
+              <a:t>1/27/13</a:t>
             </a:fld>
             <a:endParaRPr lang="en-US"/>
           </a:p>
@@ -1873,9 +1872,10 @@
           <a:lstStyle/>
           <a:p>
             <a:r>
-              <a:rPr lang="en-US"/>
+              <a:rPr lang="en-US" smtClean="0"/>
               <a:t>Click to edit Master title style</a:t>
             </a:r>
+            <a:endParaRPr lang="en-US"/>
           </a:p>
         </p:txBody>
       </p:sp>
@@ -1896,7 +1896,7 @@
           <a:p>
             <a:fld id="{5BCAD085-E8A6-8845-BD4E-CB4CCA059FC4}" type="datetimeFigureOut">
               <a:rPr lang="en-US" smtClean="0"/>
-              <a:t>9/15/2026</a:t>
+              <a:t>1/27/13</a:t>
             </a:fld>
             <a:endParaRPr lang="en-US"/>
           </a:p>
@@ -1991,7 +1991,7 @@
           <a:p>
             <a:fld id="{5BCAD085-E8A6-8845-BD4E-CB4CCA059FC4}" type="datetimeFigureOut">
               <a:rPr lang="en-US" smtClean="0"/>
-              <a:t>9/15/2026</a:t>
+              <a:t>1/27/13</a:t>
             </a:fld>
             <a:endParaRPr lang="en-US"/>
           </a:p>
@@ -2094,9 +2094,10 @@
           </a:lstStyle>
           <a:p>
             <a:r>
-              <a:rPr lang="en-US"/>
+              <a:rPr lang="en-US" smtClean="0"/>
               <a:t>Click to edit Master title style</a:t>
             </a:r>
+            <a:endParaRPr lang="en-US"/>
           </a:p>
         </p:txBody>
       </p:sp>
@@ -2150,37 +2151,38 @@
           <a:p>
             <a:pPr lvl="0"/>
             <a:r>
-              <a:rPr lang="en-US"/>
+              <a:rPr lang="en-US" smtClean="0"/>
               <a:t>Click to edit Master text styles</a:t>
             </a:r>
           </a:p>
           <a:p>
             <a:pPr lvl="1"/>
             <a:r>
-              <a:rPr lang="en-US"/>
+              <a:rPr lang="en-US" smtClean="0"/>
               <a:t>Second level</a:t>
             </a:r>
           </a:p>
           <a:p>
             <a:pPr lvl="2"/>
             <a:r>
-              <a:rPr lang="en-US"/>
+              <a:rPr lang="en-US" smtClean="0"/>
               <a:t>Third level</a:t>
             </a:r>
           </a:p>
           <a:p>
             <a:pPr lvl="3"/>
             <a:r>
-              <a:rPr lang="en-US"/>
+              <a:rPr lang="en-US" smtClean="0"/>
               <a:t>Fourth level</a:t>
             </a:r>
           </a:p>
           <a:p>
             <a:pPr lvl="4"/>
             <a:r>
-              <a:rPr lang="en-US"/>
+              <a:rPr lang="en-US" smtClean="0"/>
               <a:t>Fifth level</a:t>
             </a:r>
+            <a:endParaRPr lang="en-US"/>
           </a:p>
         </p:txBody>
       </p:sp>
@@ -2243,7 +2245,7 @@
           <a:p>
             <a:pPr lvl="0"/>
             <a:r>
-              <a:rPr lang="en-US"/>
+              <a:rPr lang="en-US" smtClean="0"/>
               <a:t>Click to edit Master text styles</a:t>
             </a:r>
           </a:p>
@@ -2266,7 +2268,7 @@
           <a:p>
             <a:fld id="{5BCAD085-E8A6-8845-BD4E-CB4CCA059FC4}" type="datetimeFigureOut">
               <a:rPr lang="en-US" smtClean="0"/>
-              <a:t>9/15/2026</a:t>
+              <a:t>1/27/13</a:t>
             </a:fld>
             <a:endParaRPr lang="en-US"/>
           </a:p>
@@ -2369,9 +2371,10 @@
           </a:lstStyle>
           <a:p>
             <a:r>
-              <a:rPr lang="en-US"/>
+              <a:rPr lang="en-US" smtClean="0"/>
               <a:t>Click to edit Master title style</a:t>
             </a:r>
+            <a:endParaRPr lang="en-US"/>
           </a:p>
         </p:txBody>
       </p:sp>
@@ -2495,7 +2498,7 @@
           <a:p>
             <a:pPr lvl="0"/>
             <a:r>
-              <a:rPr lang="en-US"/>
+              <a:rPr lang="en-US" smtClean="0"/>
               <a:t>Click to edit Master text styles</a:t>
             </a:r>
           </a:p>
@@ -2518,7 +2521,7 @@
           <a:p>
             <a:fld id="{5BCAD085-E8A6-8845-BD4E-CB4CCA059FC4}" type="datetimeFigureOut">
               <a:rPr lang="en-US" smtClean="0"/>
-              <a:t>9/15/2026</a:t>
+              <a:t>1/27/13</a:t>
             </a:fld>
             <a:endParaRPr lang="en-US"/>
           </a:p>
@@ -2627,9 +2630,10 @@
           <a:lstStyle/>
           <a:p>
             <a:r>
-              <a:rPr lang="en-US"/>
+              <a:rPr lang="en-US" smtClean="0"/>
               <a:t>Click to edit Master title style</a:t>
             </a:r>
+            <a:endParaRPr lang="en-US"/>
           </a:p>
         </p:txBody>
       </p:sp>
@@ -2660,37 +2664,38 @@
           <a:p>
             <a:pPr lvl="0"/>
             <a:r>
-              <a:rPr lang="en-US"/>
+              <a:rPr lang="en-US" smtClean="0"/>
               <a:t>Click to edit Master text styles</a:t>
             </a:r>
           </a:p>
           <a:p>
             <a:pPr lvl="1"/>
             <a:r>
-              <a:rPr lang="en-US"/>
+              <a:rPr lang="en-US" smtClean="0"/>
               <a:t>Second level</a:t>
             </a:r>
           </a:p>
           <a:p>
             <a:pPr lvl="2"/>
             <a:r>
-              <a:rPr lang="en-US"/>
+              <a:rPr lang="en-US" smtClean="0"/>
               <a:t>Third level</a:t>
             </a:r>
           </a:p>
           <a:p>
             <a:pPr lvl="3"/>
             <a:r>
-              <a:rPr lang="en-US"/>
+              <a:rPr lang="en-US" smtClean="0"/>
               <a:t>Fourth level</a:t>
             </a:r>
           </a:p>
           <a:p>
             <a:pPr lvl="4"/>
             <a:r>
-              <a:rPr lang="en-US"/>
+              <a:rPr lang="en-US" smtClean="0"/>
               <a:t>Fifth level</a:t>
             </a:r>
+            <a:endParaRPr lang="en-US"/>
           </a:p>
         </p:txBody>
       </p:sp>
@@ -2729,7 +2734,7 @@
           <a:p>
             <a:fld id="{5BCAD085-E8A6-8845-BD4E-CB4CCA059FC4}" type="datetimeFigureOut">
               <a:rPr lang="en-US" smtClean="0"/>
-              <a:t>9/15/2026</a:t>
+              <a:t>1/27/13</a:t>
             </a:fld>
             <a:endParaRPr lang="en-US"/>
           </a:p>
@@ -3088,7 +3093,7 @@
 </file>
 
 <file path=ppt/slides/slide1.xml><?xml version="1.0" encoding="utf-8"?>
-<p:sld xmlns:a="http://schemas.openxmlformats.org/drawingml/2006/main" xmlns:r="http://schemas.openxmlformats.org/officeDocument/2006/relationships" xmlns:p="http://schemas.openxmlformats.org/presentationml/2006/main">
+<p:sld xmlns:a="http://schemas.openxmlformats.org/drawingml/2006/main" xmlns:p="http://schemas.openxmlformats.org/presentationml/2006/main" xmlns:r="http://schemas.openxmlformats.org/officeDocument/2006/relationships">
   <p:cSld>
     <p:spTree>
       <p:nvGrpSpPr>
@@ -3096,14 +3101,7 @@
         <p:cNvGrpSpPr/>
         <p:nvPr/>
       </p:nvGrpSpPr>
-      <p:grpSpPr>
-        <a:xfrm>
-          <a:off x="0" y="0"/>
-          <a:ext cx="0" cy="0"/>
-          <a:chOff x="0" y="0"/>
-          <a:chExt cx="0" cy="0"/>
-        </a:xfrm>
-      </p:grpSpPr>
+      <p:grpSpPr/>
       <p:sp>
         <p:nvSpPr>
           <p:cNvPr id="2" name="Rectangle 1"/>
@@ -3144,7 +3142,6 @@
           <a:lstStyle/>
           <a:p>
             <a:pPr algn="ctr"/>
-            <a:endParaRPr/>
           </a:p>
         </p:txBody>
       </p:sp>
@@ -3190,7 +3187,6 @@
           <a:lstStyle/>
           <a:p>
             <a:pPr algn="ctr"/>
-            <a:endParaRPr/>
           </a:p>
         </p:txBody>
       </p:sp>
@@ -3220,7 +3216,7 @@
               <a:spcAft>
                 <a:spcPts val="1400"/>
               </a:spcAft>
-              <a:defRPr sz="1000" b="1">
+              <a:defRPr b="1" sz="1000">
                 <a:solidFill>
                   <a:srgbClr val="4F46E5"/>
                 </a:solidFill>
@@ -3235,7 +3231,7 @@
               <a:spcAft>
                 <a:spcPts val="400"/>
               </a:spcAft>
-              <a:defRPr sz="4400" b="1">
+              <a:defRPr b="1" sz="4400">
                 <a:solidFill>
                   <a:srgbClr val="0F172A"/>
                 </a:solidFill>
@@ -3250,7 +3246,7 @@
               <a:spcAft>
                 <a:spcPts val="2000"/>
               </a:spcAft>
-              <a:defRPr sz="1800" b="1">
+              <a:defRPr b="1" sz="1800">
                 <a:solidFill>
                   <a:srgbClr val="4F46E5"/>
                 </a:solidFill>
@@ -3272,19 +3268,19 @@
               </a:defRPr>
             </a:pPr>
             <a:r>
-              <a:t>A minimalist, ad-free mobile learning environment pairing gamified tactile modules, 9 humanized companion voices, authentic Malayalam bedtime stories, and PIN-secured parental screen-time governance.</a:t>
-            </a:r>
-          </a:p>
-          <a:p>
-            <a:pPr>
-              <a:defRPr sz="1100" b="1">
+              <a:t>A minimalist, ad-free mobile learning environment pairing gamified tactile modules, 100% on-device Piper neural voices, 3D Virtual Companion Simulator, authentic Malayalam bedtime stories, and PIN-secured parental screen-time governance.</a:t>
+            </a:r>
+          </a:p>
+          <a:p>
+            <a:pPr>
+              <a:defRPr b="1" sz="1100">
                 <a:solidFill>
                   <a:srgbClr val="0D9488"/>
                 </a:solidFill>
               </a:defRPr>
             </a:pPr>
             <a:r>
-              <a:t>Flutter &amp; Dart  •  100% Offline-Ready  •  Zero Ads  •  Auto-Detect TTS  •  Parent Gate</a:t>
+              <a:t>Flutter &amp; Dart  •  100% Offline Piper Neural TTS  •  Zero Ads  •  3D Virtual Simulator  •  Parent Gate</a:t>
             </a:r>
           </a:p>
         </p:txBody>
@@ -3322,7 +3318,7 @@
 </file>
 
 <file path=ppt/slides/slide10.xml><?xml version="1.0" encoding="utf-8"?>
-<p:sld xmlns:a="http://schemas.openxmlformats.org/drawingml/2006/main" xmlns:r="http://schemas.openxmlformats.org/officeDocument/2006/relationships" xmlns:p="http://schemas.openxmlformats.org/presentationml/2006/main">
+<p:sld xmlns:a="http://schemas.openxmlformats.org/drawingml/2006/main" xmlns:p="http://schemas.openxmlformats.org/presentationml/2006/main" xmlns:r="http://schemas.openxmlformats.org/officeDocument/2006/relationships">
   <p:cSld>
     <p:spTree>
       <p:nvGrpSpPr>
@@ -3330,14 +3326,7 @@
         <p:cNvGrpSpPr/>
         <p:nvPr/>
       </p:nvGrpSpPr>
-      <p:grpSpPr>
-        <a:xfrm>
-          <a:off x="0" y="0"/>
-          <a:ext cx="0" cy="0"/>
-          <a:chOff x="0" y="0"/>
-          <a:chExt cx="0" cy="0"/>
-        </a:xfrm>
-      </p:grpSpPr>
+      <p:grpSpPr/>
       <p:sp>
         <p:nvSpPr>
           <p:cNvPr id="2" name="Rectangle 1"/>
@@ -3378,7 +3367,6 @@
           <a:lstStyle/>
           <a:p>
             <a:pPr algn="ctr"/>
-            <a:endParaRPr/>
           </a:p>
         </p:txBody>
       </p:sp>
@@ -3390,7 +3378,7 @@
         </p:nvSpPr>
         <p:spPr>
           <a:xfrm>
-            <a:off x="731520" y="243840"/>
+            <a:off x="731520" y="457200"/>
             <a:ext cx="1645920" cy="256032"/>
           </a:xfrm>
           <a:prstGeom prst="roundRect">
@@ -3420,11 +3408,11 @@
           </a:fontRef>
         </p:style>
         <p:txBody>
-          <a:bodyPr wrap="square" lIns="45720" tIns="9144" rIns="45720" bIns="9144" rtlCol="0" anchor="ctr"/>
+          <a:bodyPr rtlCol="0" anchor="ctr" wrap="square" lIns="45720" rIns="45720" tIns="9144" bIns="9144"/>
           <a:lstStyle/>
           <a:p>
             <a:pPr algn="ctr">
-              <a:defRPr sz="950" b="1">
+              <a:defRPr b="1" sz="950">
                 <a:solidFill>
                   <a:srgbClr val="4F46E5"/>
                 </a:solidFill>
@@ -3444,8 +3432,8 @@
         </p:nvSpPr>
         <p:spPr>
           <a:xfrm>
-            <a:off x="731520" y="499872"/>
-            <a:ext cx="10728655" cy="384721"/>
+            <a:off x="731520" y="749808"/>
+            <a:ext cx="10728655" cy="731520"/>
           </a:xfrm>
           <a:prstGeom prst="rect">
             <a:avLst/>
@@ -3459,28 +3447,78 @@
           <a:lstStyle/>
           <a:p>
             <a:pPr>
-              <a:defRPr sz="2200" b="1">
+              <a:defRPr b="1" sz="2200">
                 <a:solidFill>
                   <a:srgbClr val="0F172A"/>
                 </a:solidFill>
               </a:defRPr>
             </a:pPr>
             <a:r>
-              <a:rPr dirty="0"/>
               <a:t>Data Flow Diagram: Level 1 (Process Decomposition)</a:t>
             </a:r>
+          </a:p>
+          <a:p>
+            <a:pPr>
+              <a:defRPr sz="1100">
+                <a:solidFill>
+                  <a:srgbClr val="475569"/>
+                </a:solidFill>
+              </a:defRPr>
+            </a:pPr>
+            <a:r>
+              <a:t>Sub-Processes, Data Stores (D1–D5), and Inter-Process Data Routing</a:t>
+            </a:r>
+          </a:p>
+        </p:txBody>
+      </p:sp>
+      <p:sp>
+        <p:nvSpPr>
+          <p:cNvPr id="5" name="Rounded Rectangle 4"/>
+          <p:cNvSpPr/>
+          <p:nvPr/>
+        </p:nvSpPr>
+        <p:spPr>
+          <a:xfrm>
+            <a:off x="731520" y="1645920"/>
+            <a:ext cx="10728655" cy="4663440"/>
+          </a:xfrm>
+          <a:prstGeom prst="roundRect">
+            <a:avLst/>
+          </a:prstGeom>
+          <a:solidFill>
+            <a:srgbClr val="FFFFFF"/>
+          </a:solidFill>
+          <a:ln w="12700">
+            <a:solidFill>
+              <a:srgbClr val="E2E8F0"/>
+            </a:solidFill>
+          </a:ln>
+        </p:spPr>
+        <p:style>
+          <a:lnRef idx="1">
+            <a:schemeClr val="accent1"/>
+          </a:lnRef>
+          <a:fillRef idx="3">
+            <a:schemeClr val="accent1"/>
+          </a:fillRef>
+          <a:effectRef idx="2">
+            <a:schemeClr val="accent1"/>
+          </a:effectRef>
+          <a:fontRef idx="minor">
+            <a:schemeClr val="lt1"/>
+          </a:fontRef>
+        </p:style>
+        <p:txBody>
+          <a:bodyPr rtlCol="0" anchor="ctr"/>
+          <a:lstStyle/>
+          <a:p>
+            <a:pPr algn="ctr"/>
           </a:p>
         </p:txBody>
       </p:sp>
       <p:pic>
         <p:nvPicPr>
-          <p:cNvPr id="8" name="Picture 7">
-            <a:extLst>
-              <a:ext uri="{FF2B5EF4-FFF2-40B4-BE49-F238E27FC236}">
-                <a16:creationId xmlns:a16="http://schemas.microsoft.com/office/drawing/2014/main" id="{AE482C07-60D0-EDDE-AE38-733DB8DBA842}"/>
-              </a:ext>
-            </a:extLst>
-          </p:cNvPr>
+          <p:cNvPr id="6" name="Picture 5" descr="dfd_level_1.png"/>
           <p:cNvPicPr>
             <a:picLocks noChangeAspect="1"/>
           </p:cNvPicPr>
@@ -3494,8 +3532,8 @@
         </p:blipFill>
         <p:spPr>
           <a:xfrm>
-            <a:off x="0" y="755904"/>
-            <a:ext cx="11734800" cy="5972175"/>
+            <a:off x="1097280" y="1783080"/>
+            <a:ext cx="9997135" cy="6248209"/>
           </a:xfrm>
           <a:prstGeom prst="rect">
             <a:avLst/>
@@ -3511,7 +3549,7 @@
 </file>
 
 <file path=ppt/slides/slide11.xml><?xml version="1.0" encoding="utf-8"?>
-<p:sld xmlns:a="http://schemas.openxmlformats.org/drawingml/2006/main" xmlns:r="http://schemas.openxmlformats.org/officeDocument/2006/relationships" xmlns:p="http://schemas.openxmlformats.org/presentationml/2006/main">
+<p:sld xmlns:a="http://schemas.openxmlformats.org/drawingml/2006/main" xmlns:p="http://schemas.openxmlformats.org/presentationml/2006/main" xmlns:r="http://schemas.openxmlformats.org/officeDocument/2006/relationships">
   <p:cSld>
     <p:spTree>
       <p:nvGrpSpPr>
@@ -3519,14 +3557,7 @@
         <p:cNvGrpSpPr/>
         <p:nvPr/>
       </p:nvGrpSpPr>
-      <p:grpSpPr>
-        <a:xfrm>
-          <a:off x="0" y="0"/>
-          <a:ext cx="0" cy="0"/>
-          <a:chOff x="0" y="0"/>
-          <a:chExt cx="0" cy="0"/>
-        </a:xfrm>
-      </p:grpSpPr>
+      <p:grpSpPr/>
       <p:sp>
         <p:nvSpPr>
           <p:cNvPr id="2" name="Rectangle 1"/>
@@ -3567,7 +3598,6 @@
           <a:lstStyle/>
           <a:p>
             <a:pPr algn="ctr"/>
-            <a:endParaRPr/>
           </a:p>
         </p:txBody>
       </p:sp>
@@ -3609,11 +3639,11 @@
           </a:fontRef>
         </p:style>
         <p:txBody>
-          <a:bodyPr wrap="square" lIns="45720" tIns="9144" rIns="45720" bIns="9144" rtlCol="0" anchor="ctr"/>
+          <a:bodyPr rtlCol="0" anchor="ctr" wrap="square" lIns="45720" rIns="45720" tIns="9144" bIns="9144"/>
           <a:lstStyle/>
           <a:p>
             <a:pPr algn="ctr">
-              <a:defRPr sz="950" b="1">
+              <a:defRPr b="1" sz="950">
                 <a:solidFill>
                   <a:srgbClr val="4F46E5"/>
                 </a:solidFill>
@@ -3648,7 +3678,7 @@
           <a:lstStyle/>
           <a:p>
             <a:pPr>
-              <a:defRPr sz="2200" b="1">
+              <a:defRPr b="1" sz="2200">
                 <a:solidFill>
                   <a:srgbClr val="0F172A"/>
                 </a:solidFill>
@@ -3714,7 +3744,6 @@
           <a:lstStyle/>
           <a:p>
             <a:pPr algn="ctr"/>
-            <a:endParaRPr/>
           </a:p>
         </p:txBody>
       </p:sp>
@@ -3741,7 +3770,7 @@
           <a:lstStyle/>
           <a:p>
             <a:pPr>
-              <a:defRPr sz="1300" b="1">
+              <a:defRPr b="1" sz="1300">
                 <a:solidFill>
                   <a:srgbClr val="4F46E5"/>
                 </a:solidFill>
@@ -3781,7 +3810,7 @@
               </a:spcAft>
             </a:pPr>
             <a:r>
-              <a:rPr sz="1100" b="1">
+              <a:rPr b="1" sz="1100">
                 <a:solidFill>
                   <a:srgbClr val="4F46E5"/>
                 </a:solidFill>
@@ -3789,7 +3818,7 @@
               <a:t>•  </a:t>
             </a:r>
             <a:r>
-              <a:rPr sz="1050" b="1">
+              <a:rPr b="1" sz="1050">
                 <a:solidFill>
                   <a:srgbClr val="0F172A"/>
                 </a:solidFill>
@@ -3812,7 +3841,7 @@
               </a:spcAft>
             </a:pPr>
             <a:r>
-              <a:rPr sz="1100" b="1">
+              <a:rPr b="1" sz="1100">
                 <a:solidFill>
                   <a:srgbClr val="4F46E5"/>
                 </a:solidFill>
@@ -3820,7 +3849,7 @@
               <a:t>•  </a:t>
             </a:r>
             <a:r>
-              <a:rPr sz="1050" b="1">
+              <a:rPr b="1" sz="1050">
                 <a:solidFill>
                   <a:srgbClr val="0F172A"/>
                 </a:solidFill>
@@ -3843,7 +3872,7 @@
               </a:spcAft>
             </a:pPr>
             <a:r>
-              <a:rPr sz="1100" b="1">
+              <a:rPr b="1" sz="1100">
                 <a:solidFill>
                   <a:srgbClr val="4F46E5"/>
                 </a:solidFill>
@@ -3851,7 +3880,7 @@
               <a:t>•  </a:t>
             </a:r>
             <a:r>
-              <a:rPr sz="1050" b="1">
+              <a:rPr b="1" sz="1050">
                 <a:solidFill>
                   <a:srgbClr val="0F172A"/>
                 </a:solidFill>
@@ -3874,7 +3903,7 @@
               </a:spcAft>
             </a:pPr>
             <a:r>
-              <a:rPr sz="1100" b="1">
+              <a:rPr b="1" sz="1100">
                 <a:solidFill>
                   <a:srgbClr val="4F46E5"/>
                 </a:solidFill>
@@ -3882,7 +3911,7 @@
               <a:t>•  </a:t>
             </a:r>
             <a:r>
-              <a:rPr sz="1050" b="1">
+              <a:rPr b="1" sz="1050">
                 <a:solidFill>
                   <a:srgbClr val="0F172A"/>
                 </a:solidFill>
@@ -3942,7 +3971,6 @@
           <a:lstStyle/>
           <a:p>
             <a:pPr algn="ctr"/>
-            <a:endParaRPr/>
           </a:p>
         </p:txBody>
       </p:sp>
@@ -3969,7 +3997,7 @@
           <a:lstStyle/>
           <a:p>
             <a:pPr>
-              <a:defRPr sz="1300" b="1">
+              <a:defRPr b="1" sz="1300">
                 <a:solidFill>
                   <a:srgbClr val="D97706"/>
                 </a:solidFill>
@@ -4009,7 +4037,7 @@
               </a:spcAft>
             </a:pPr>
             <a:r>
-              <a:rPr sz="1100" b="1">
+              <a:rPr b="1" sz="1100">
                 <a:solidFill>
                   <a:srgbClr val="D97706"/>
                 </a:solidFill>
@@ -4017,7 +4045,7 @@
               <a:t>•  </a:t>
             </a:r>
             <a:r>
-              <a:rPr sz="1050" b="1">
+              <a:rPr b="1" sz="1050">
                 <a:solidFill>
                   <a:srgbClr val="0F172A"/>
                 </a:solidFill>
@@ -4040,7 +4068,7 @@
               </a:spcAft>
             </a:pPr>
             <a:r>
-              <a:rPr sz="1100" b="1">
+              <a:rPr b="1" sz="1100">
                 <a:solidFill>
                   <a:srgbClr val="D97706"/>
                 </a:solidFill>
@@ -4048,7 +4076,7 @@
               <a:t>•  </a:t>
             </a:r>
             <a:r>
-              <a:rPr sz="1050" b="1">
+              <a:rPr b="1" sz="1050">
                 <a:solidFill>
                   <a:srgbClr val="0F172A"/>
                 </a:solidFill>
@@ -4071,7 +4099,7 @@
               </a:spcAft>
             </a:pPr>
             <a:r>
-              <a:rPr sz="1100" b="1">
+              <a:rPr b="1" sz="1100">
                 <a:solidFill>
                   <a:srgbClr val="D97706"/>
                 </a:solidFill>
@@ -4079,7 +4107,7 @@
               <a:t>•  </a:t>
             </a:r>
             <a:r>
-              <a:rPr sz="1050" b="1">
+              <a:rPr b="1" sz="1050">
                 <a:solidFill>
                   <a:srgbClr val="0F172A"/>
                 </a:solidFill>
@@ -4102,7 +4130,7 @@
               </a:spcAft>
             </a:pPr>
             <a:r>
-              <a:rPr sz="1100" b="1">
+              <a:rPr b="1" sz="1100">
                 <a:solidFill>
                   <a:srgbClr val="D97706"/>
                 </a:solidFill>
@@ -4110,7 +4138,7 @@
               <a:t>•  </a:t>
             </a:r>
             <a:r>
-              <a:rPr sz="1050" b="1">
+              <a:rPr b="1" sz="1050">
                 <a:solidFill>
                   <a:srgbClr val="0F172A"/>
                 </a:solidFill>
@@ -4170,7 +4198,6 @@
           <a:lstStyle/>
           <a:p>
             <a:pPr algn="ctr"/>
-            <a:endParaRPr/>
           </a:p>
         </p:txBody>
       </p:sp>
@@ -4197,7 +4224,7 @@
           <a:lstStyle/>
           <a:p>
             <a:pPr>
-              <a:defRPr sz="1300" b="1">
+              <a:defRPr b="1" sz="1300">
                 <a:solidFill>
                   <a:srgbClr val="0D9488"/>
                 </a:solidFill>
@@ -4237,7 +4264,7 @@
               </a:spcAft>
             </a:pPr>
             <a:r>
-              <a:rPr sz="1100" b="1">
+              <a:rPr b="1" sz="1100">
                 <a:solidFill>
                   <a:srgbClr val="0D9488"/>
                 </a:solidFill>
@@ -4245,7 +4272,7 @@
               <a:t>•  </a:t>
             </a:r>
             <a:r>
-              <a:rPr sz="1050" b="1">
+              <a:rPr b="1" sz="1050">
                 <a:solidFill>
                   <a:srgbClr val="0F172A"/>
                 </a:solidFill>
@@ -4268,7 +4295,7 @@
               </a:spcAft>
             </a:pPr>
             <a:r>
-              <a:rPr sz="1100" b="1">
+              <a:rPr b="1" sz="1100">
                 <a:solidFill>
                   <a:srgbClr val="0D9488"/>
                 </a:solidFill>
@@ -4276,7 +4303,7 @@
               <a:t>•  </a:t>
             </a:r>
             <a:r>
-              <a:rPr sz="1050" b="1">
+              <a:rPr b="1" sz="1050">
                 <a:solidFill>
                   <a:srgbClr val="0F172A"/>
                 </a:solidFill>
@@ -4299,7 +4326,7 @@
               </a:spcAft>
             </a:pPr>
             <a:r>
-              <a:rPr sz="1100" b="1">
+              <a:rPr b="1" sz="1100">
                 <a:solidFill>
                   <a:srgbClr val="0D9488"/>
                 </a:solidFill>
@@ -4307,7 +4334,7 @@
               <a:t>•  </a:t>
             </a:r>
             <a:r>
-              <a:rPr sz="1050" b="1">
+              <a:rPr b="1" sz="1050">
                 <a:solidFill>
                   <a:srgbClr val="0F172A"/>
                 </a:solidFill>
@@ -4330,7 +4357,7 @@
               </a:spcAft>
             </a:pPr>
             <a:r>
-              <a:rPr sz="1100" b="1">
+              <a:rPr b="1" sz="1100">
                 <a:solidFill>
                   <a:srgbClr val="0D9488"/>
                 </a:solidFill>
@@ -4338,7 +4365,7 @@
               <a:t>•  </a:t>
             </a:r>
             <a:r>
-              <a:rPr sz="1050" b="1">
+              <a:rPr b="1" sz="1050">
                 <a:solidFill>
                   <a:srgbClr val="0F172A"/>
                 </a:solidFill>
@@ -4365,7 +4392,7 @@
 </file>
 
 <file path=ppt/slides/slide12.xml><?xml version="1.0" encoding="utf-8"?>
-<p:sld xmlns:a="http://schemas.openxmlformats.org/drawingml/2006/main" xmlns:r="http://schemas.openxmlformats.org/officeDocument/2006/relationships" xmlns:p="http://schemas.openxmlformats.org/presentationml/2006/main">
+<p:sld xmlns:a="http://schemas.openxmlformats.org/drawingml/2006/main" xmlns:p="http://schemas.openxmlformats.org/presentationml/2006/main" xmlns:r="http://schemas.openxmlformats.org/officeDocument/2006/relationships">
   <p:cSld>
     <p:spTree>
       <p:nvGrpSpPr>
@@ -4373,14 +4400,7 @@
         <p:cNvGrpSpPr/>
         <p:nvPr/>
       </p:nvGrpSpPr>
-      <p:grpSpPr>
-        <a:xfrm>
-          <a:off x="0" y="0"/>
-          <a:ext cx="0" cy="0"/>
-          <a:chOff x="0" y="0"/>
-          <a:chExt cx="0" cy="0"/>
-        </a:xfrm>
-      </p:grpSpPr>
+      <p:grpSpPr/>
       <p:sp>
         <p:nvSpPr>
           <p:cNvPr id="2" name="Rectangle 1"/>
@@ -4421,7 +4441,6 @@
           <a:lstStyle/>
           <a:p>
             <a:pPr algn="ctr"/>
-            <a:endParaRPr/>
           </a:p>
         </p:txBody>
       </p:sp>
@@ -4463,11 +4482,11 @@
           </a:fontRef>
         </p:style>
         <p:txBody>
-          <a:bodyPr wrap="square" lIns="45720" tIns="9144" rIns="45720" bIns="9144" rtlCol="0" anchor="ctr"/>
+          <a:bodyPr rtlCol="0" anchor="ctr" wrap="square" lIns="45720" rIns="45720" tIns="9144" bIns="9144"/>
           <a:lstStyle/>
           <a:p>
             <a:pPr algn="ctr">
-              <a:defRPr sz="950" b="1">
+              <a:defRPr b="1" sz="950">
                 <a:solidFill>
                   <a:srgbClr val="4F46E5"/>
                 </a:solidFill>
@@ -4502,7 +4521,7 @@
           <a:lstStyle/>
           <a:p>
             <a:pPr>
-              <a:defRPr sz="2200" b="1">
+              <a:defRPr b="1" sz="2200">
                 <a:solidFill>
                   <a:srgbClr val="0F172A"/>
                 </a:solidFill>
@@ -4568,7 +4587,6 @@
           <a:lstStyle/>
           <a:p>
             <a:pPr algn="ctr"/>
-            <a:endParaRPr/>
           </a:p>
         </p:txBody>
       </p:sp>
@@ -4595,7 +4613,7 @@
           <a:lstStyle/>
           <a:p>
             <a:pPr>
-              <a:defRPr sz="1300" b="1">
+              <a:defRPr b="1" sz="1300">
                 <a:solidFill>
                   <a:srgbClr val="4F46E5"/>
                 </a:solidFill>
@@ -4635,7 +4653,7 @@
               </a:spcAft>
             </a:pPr>
             <a:r>
-              <a:rPr sz="1100" b="1">
+              <a:rPr b="1" sz="1100">
                 <a:solidFill>
                   <a:srgbClr val="4F46E5"/>
                 </a:solidFill>
@@ -4643,7 +4661,7 @@
               <a:t>•  </a:t>
             </a:r>
             <a:r>
-              <a:rPr sz="1050" b="1">
+              <a:rPr b="1" sz="1050">
                 <a:solidFill>
                   <a:srgbClr val="0F172A"/>
                 </a:solidFill>
@@ -4666,7 +4684,7 @@
               </a:spcAft>
             </a:pPr>
             <a:r>
-              <a:rPr sz="1100" b="1">
+              <a:rPr b="1" sz="1100">
                 <a:solidFill>
                   <a:srgbClr val="4F46E5"/>
                 </a:solidFill>
@@ -4674,12 +4692,12 @@
               <a:t>•  </a:t>
             </a:r>
             <a:r>
-              <a:rPr sz="1050" b="1">
+              <a:rPr b="1" sz="1050">
                 <a:solidFill>
                   <a:srgbClr val="0F172A"/>
                 </a:solidFill>
               </a:rPr>
-              <a:t>Media &amp; Culture Hub: </a:t>
+              <a:t>Interactive 3D Simulator: </a:t>
             </a:r>
             <a:r>
               <a:rPr sz="1000">
@@ -4687,7 +4705,7 @@
                   <a:srgbClr val="475569"/>
                 </a:solidFill>
               </a:rPr>
-              <a:t>Wildlife Safari, Fruits &amp; Veggies, Musical Fun Rhymes player.</a:t>
+              <a:t>Voice repetition, multi-zone touch physics (hair, cheek, belly), snack feeding.</a:t>
             </a:r>
           </a:p>
           <a:p>
@@ -4697,7 +4715,7 @@
               </a:spcAft>
             </a:pPr>
             <a:r>
-              <a:rPr sz="1100" b="1">
+              <a:rPr b="1" sz="1100">
                 <a:solidFill>
                   <a:srgbClr val="4F46E5"/>
                 </a:solidFill>
@@ -4705,7 +4723,7 @@
               <a:t>•  </a:t>
             </a:r>
             <a:r>
-              <a:rPr sz="1050" b="1">
+              <a:rPr b="1" sz="1050">
                 <a:solidFill>
                   <a:srgbClr val="0F172A"/>
                 </a:solidFill>
@@ -4718,7 +4736,7 @@
                   <a:srgbClr val="475569"/>
                 </a:solidFill>
               </a:rPr>
-              <a:t>12 moral stories with 1-tap language filtering and 'Read to Me 🔊'.</a:t>
+              <a:t>12 moral stories with 1-tap bilingual filtering and neural narration.</a:t>
             </a:r>
           </a:p>
           <a:p>
@@ -4728,7 +4746,7 @@
               </a:spcAft>
             </a:pPr>
             <a:r>
-              <a:rPr sz="1100" b="1">
+              <a:rPr b="1" sz="1100">
                 <a:solidFill>
                   <a:srgbClr val="4F46E5"/>
                 </a:solidFill>
@@ -4736,7 +4754,7 @@
               <a:t>•  </a:t>
             </a:r>
             <a:r>
-              <a:rPr sz="1050" b="1">
+              <a:rPr b="1" sz="1050">
                 <a:solidFill>
                   <a:srgbClr val="0F172A"/>
                 </a:solidFill>
@@ -4796,7 +4814,6 @@
           <a:lstStyle/>
           <a:p>
             <a:pPr algn="ctr"/>
-            <a:endParaRPr/>
           </a:p>
         </p:txBody>
       </p:sp>
@@ -4823,14 +4840,14 @@
           <a:lstStyle/>
           <a:p>
             <a:pPr>
-              <a:defRPr sz="1300" b="1">
+              <a:defRPr b="1" sz="1300">
                 <a:solidFill>
                   <a:srgbClr val="0D9488"/>
                 </a:solidFill>
               </a:defRPr>
             </a:pPr>
             <a:r>
-              <a:t>Algorithm 1: Script-Aware TTS</a:t>
+              <a:t>Algorithm 1: On-Device Neural TTS</a:t>
             </a:r>
           </a:p>
         </p:txBody>
@@ -4863,7 +4880,7 @@
               </a:spcAft>
             </a:pPr>
             <a:r>
-              <a:rPr sz="1100" b="1">
+              <a:rPr b="1" sz="1100">
                 <a:solidFill>
                   <a:srgbClr val="0D9488"/>
                 </a:solidFill>
@@ -4871,12 +4888,12 @@
               <a:t>•  </a:t>
             </a:r>
             <a:r>
-              <a:rPr sz="1050" b="1">
+              <a:rPr b="1" sz="1050">
                 <a:solidFill>
                   <a:srgbClr val="0F172A"/>
                 </a:solidFill>
               </a:rPr>
-              <a:t>Step 1 (Input): </a:t>
+              <a:t>Step 1 (Input &amp; Script Check): </a:t>
             </a:r>
             <a:r>
               <a:rPr sz="1000">
@@ -4884,7 +4901,7 @@
                   <a:srgbClr val="475569"/>
                 </a:solidFill>
               </a:rPr>
-              <a:t>Ingest text payload into ModularTtsService.speak(text).</a:t>
+              <a:t>Ingest text into PiperTtsService; inspect for Malayalam unicode range [\u0D00-\u0D7F].</a:t>
             </a:r>
           </a:p>
           <a:p>
@@ -4894,7 +4911,7 @@
               </a:spcAft>
             </a:pPr>
             <a:r>
-              <a:rPr sz="1100" b="1">
+              <a:rPr b="1" sz="1100">
                 <a:solidFill>
                   <a:srgbClr val="0D9488"/>
                 </a:solidFill>
@@ -4902,12 +4919,12 @@
               <a:t>•  </a:t>
             </a:r>
             <a:r>
-              <a:rPr sz="1050" b="1">
+              <a:rPr b="1" sz="1050">
                 <a:solidFill>
                   <a:srgbClr val="0F172A"/>
                 </a:solidFill>
               </a:rPr>
-              <a:t>Step 2 (Regex Match): </a:t>
+              <a:t>Step 2 (Model Dispatch): </a:t>
             </a:r>
             <a:r>
               <a:rPr sz="1000">
@@ -4915,7 +4932,7 @@
                   <a:srgbClr val="475569"/>
                 </a:solidFill>
               </a:rPr>
-              <a:t>Inspect text for Malayalam unicode range [\u0D00-\u0D7F].</a:t>
+              <a:t>Route to ml_IN-arjun-medium or en_US-lessac-medium INT8 ONNX model.</a:t>
             </a:r>
           </a:p>
           <a:p>
@@ -4925,7 +4942,7 @@
               </a:spcAft>
             </a:pPr>
             <a:r>
-              <a:rPr sz="1100" b="1">
+              <a:rPr b="1" sz="1100">
                 <a:solidFill>
                   <a:srgbClr val="0D9488"/>
                 </a:solidFill>
@@ -4933,12 +4950,12 @@
               <a:t>•  </a:t>
             </a:r>
             <a:r>
-              <a:rPr sz="1050" b="1">
+              <a:rPr b="1" sz="1050">
                 <a:solidFill>
                   <a:srgbClr val="0F172A"/>
                 </a:solidFill>
               </a:rPr>
-              <a:t>Step 3 (Branch A): </a:t>
+              <a:t>Step 3 (Neural Synthesis): </a:t>
             </a:r>
             <a:r>
               <a:rPr sz="1000">
@@ -4946,7 +4963,7 @@
                   <a:srgbClr val="475569"/>
                 </a:solidFill>
               </a:rPr>
-              <a:t>If Malayalam, set language to 'ml-IN', pitch to 1.24, rate to 0.42.</a:t>
+              <a:t>Execute sherpa_onnx.OfflineTts to generate raw 16-bit PCM audio samples.</a:t>
             </a:r>
           </a:p>
           <a:p>
@@ -4956,7 +4973,7 @@
               </a:spcAft>
             </a:pPr>
             <a:r>
-              <a:rPr sz="1100" b="1">
+              <a:rPr b="1" sz="1100">
                 <a:solidFill>
                   <a:srgbClr val="0D9488"/>
                 </a:solidFill>
@@ -4964,12 +4981,12 @@
               <a:t>•  </a:t>
             </a:r>
             <a:r>
-              <a:rPr sz="1050" b="1">
+              <a:rPr b="1" sz="1050">
                 <a:solidFill>
                   <a:srgbClr val="0F172A"/>
                 </a:solidFill>
               </a:rPr>
-              <a:t>Step 4 (Branch B): </a:t>
+              <a:t>Step 4 (Pitch Caricature): </a:t>
             </a:r>
             <a:r>
               <a:rPr sz="1000">
@@ -4977,7 +4994,7 @@
                   <a:srgbClr val="475569"/>
                 </a:solidFill>
               </a:rPr>
-              <a:t>If English, apply selected companion (e.g. Sparky pitch=1.34).</a:t>
+              <a:t>If in Simulator mode, modulate sample rate by 1.65x for Talking Tom mimicry.</a:t>
             </a:r>
           </a:p>
           <a:p>
@@ -4987,7 +5004,7 @@
               </a:spcAft>
             </a:pPr>
             <a:r>
-              <a:rPr sz="1100" b="1">
+              <a:rPr b="1" sz="1100">
                 <a:solidFill>
                   <a:srgbClr val="0D9488"/>
                 </a:solidFill>
@@ -4995,12 +5012,12 @@
               <a:t>•  </a:t>
             </a:r>
             <a:r>
-              <a:rPr sz="1050" b="1">
+              <a:rPr b="1" sz="1050">
                 <a:solidFill>
                   <a:srgbClr val="0F172A"/>
                 </a:solidFill>
               </a:rPr>
-              <a:t>Step 5 (Restore): </a:t>
+              <a:t>Step 5 (Audio Playback): </a:t>
             </a:r>
             <a:r>
               <a:rPr sz="1000">
@@ -5008,7 +5025,7 @@
                   <a:srgbClr val="475569"/>
                 </a:solidFill>
               </a:rPr>
-              <a:t>Restore active companion profile immediately after utterance.</a:t>
+              <a:t>Write RIFF/WAV header and stream directly through audioplayers.</a:t>
             </a:r>
           </a:p>
         </p:txBody>
@@ -5055,7 +5072,6 @@
           <a:lstStyle/>
           <a:p>
             <a:pPr algn="ctr"/>
-            <a:endParaRPr/>
           </a:p>
         </p:txBody>
       </p:sp>
@@ -5082,7 +5098,7 @@
           <a:lstStyle/>
           <a:p>
             <a:pPr>
-              <a:defRPr sz="1300" b="1">
+              <a:defRPr b="1" sz="1300">
                 <a:solidFill>
                   <a:srgbClr val="D97706"/>
                 </a:solidFill>
@@ -5122,7 +5138,7 @@
               </a:spcAft>
             </a:pPr>
             <a:r>
-              <a:rPr sz="1100" b="1">
+              <a:rPr b="1" sz="1100">
                 <a:solidFill>
                   <a:srgbClr val="D97706"/>
                 </a:solidFill>
@@ -5130,7 +5146,7 @@
               <a:t>•  </a:t>
             </a:r>
             <a:r>
-              <a:rPr sz="1050" b="1">
+              <a:rPr b="1" sz="1050">
                 <a:solidFill>
                   <a:srgbClr val="0F172A"/>
                 </a:solidFill>
@@ -5153,7 +5169,7 @@
               </a:spcAft>
             </a:pPr>
             <a:r>
-              <a:rPr sz="1100" b="1">
+              <a:rPr b="1" sz="1100">
                 <a:solidFill>
                   <a:srgbClr val="D97706"/>
                 </a:solidFill>
@@ -5161,7 +5177,7 @@
               <a:t>•  </a:t>
             </a:r>
             <a:r>
-              <a:rPr sz="1050" b="1">
+              <a:rPr b="1" sz="1050">
                 <a:solidFill>
                   <a:srgbClr val="0F172A"/>
                 </a:solidFill>
@@ -5184,7 +5200,7 @@
               </a:spcAft>
             </a:pPr>
             <a:r>
-              <a:rPr sz="1100" b="1">
+              <a:rPr b="1" sz="1100">
                 <a:solidFill>
                   <a:srgbClr val="D97706"/>
                 </a:solidFill>
@@ -5192,7 +5208,7 @@
               <a:t>•  </a:t>
             </a:r>
             <a:r>
-              <a:rPr sz="1050" b="1">
+              <a:rPr b="1" sz="1050">
                 <a:solidFill>
                   <a:srgbClr val="0F172A"/>
                 </a:solidFill>
@@ -5215,7 +5231,7 @@
               </a:spcAft>
             </a:pPr>
             <a:r>
-              <a:rPr sz="1100" b="1">
+              <a:rPr b="1" sz="1100">
                 <a:solidFill>
                   <a:srgbClr val="D97706"/>
                 </a:solidFill>
@@ -5223,7 +5239,7 @@
               <a:t>•  </a:t>
             </a:r>
             <a:r>
-              <a:rPr sz="1050" b="1">
+              <a:rPr b="1" sz="1050">
                 <a:solidFill>
                   <a:srgbClr val="0F172A"/>
                 </a:solidFill>
@@ -5246,7 +5262,7 @@
               </a:spcAft>
             </a:pPr>
             <a:r>
-              <a:rPr sz="1100" b="1">
+              <a:rPr b="1" sz="1100">
                 <a:solidFill>
                   <a:srgbClr val="D97706"/>
                 </a:solidFill>
@@ -5254,7 +5270,7 @@
               <a:t>•  </a:t>
             </a:r>
             <a:r>
-              <a:rPr sz="1050" b="1">
+              <a:rPr b="1" sz="1050">
                 <a:solidFill>
                   <a:srgbClr val="0F172A"/>
                 </a:solidFill>
@@ -5281,7 +5297,7 @@
 </file>
 
 <file path=ppt/slides/slide13.xml><?xml version="1.0" encoding="utf-8"?>
-<p:sld xmlns:a="http://schemas.openxmlformats.org/drawingml/2006/main" xmlns:r="http://schemas.openxmlformats.org/officeDocument/2006/relationships" xmlns:p="http://schemas.openxmlformats.org/presentationml/2006/main">
+<p:sld xmlns:a="http://schemas.openxmlformats.org/drawingml/2006/main" xmlns:p="http://schemas.openxmlformats.org/presentationml/2006/main" xmlns:r="http://schemas.openxmlformats.org/officeDocument/2006/relationships">
   <p:cSld>
     <p:spTree>
       <p:nvGrpSpPr>
@@ -5289,14 +5305,7 @@
         <p:cNvGrpSpPr/>
         <p:nvPr/>
       </p:nvGrpSpPr>
-      <p:grpSpPr>
-        <a:xfrm>
-          <a:off x="0" y="0"/>
-          <a:ext cx="0" cy="0"/>
-          <a:chOff x="0" y="0"/>
-          <a:chExt cx="0" cy="0"/>
-        </a:xfrm>
-      </p:grpSpPr>
+      <p:grpSpPr/>
       <p:sp>
         <p:nvSpPr>
           <p:cNvPr id="2" name="Rectangle 1"/>
@@ -5337,7 +5346,6 @@
           <a:lstStyle/>
           <a:p>
             <a:pPr algn="ctr"/>
-            <a:endParaRPr/>
           </a:p>
         </p:txBody>
       </p:sp>
@@ -5379,11 +5387,11 @@
           </a:fontRef>
         </p:style>
         <p:txBody>
-          <a:bodyPr wrap="square" lIns="45720" tIns="9144" rIns="45720" bIns="9144" rtlCol="0" anchor="ctr"/>
+          <a:bodyPr rtlCol="0" anchor="ctr" wrap="square" lIns="45720" rIns="45720" tIns="9144" bIns="9144"/>
           <a:lstStyle/>
           <a:p>
             <a:pPr algn="ctr">
-              <a:defRPr sz="950" b="1">
+              <a:defRPr b="1" sz="950">
                 <a:solidFill>
                   <a:srgbClr val="4F46E5"/>
                 </a:solidFill>
@@ -5418,7 +5426,7 @@
           <a:lstStyle/>
           <a:p>
             <a:pPr>
-              <a:defRPr sz="2200" b="1">
+              <a:defRPr b="1" sz="2200">
                 <a:solidFill>
                   <a:srgbClr val="0F172A"/>
                 </a:solidFill>
@@ -5484,7 +5492,6 @@
           <a:lstStyle/>
           <a:p>
             <a:pPr algn="ctr"/>
-            <a:endParaRPr/>
           </a:p>
         </p:txBody>
       </p:sp>
@@ -5511,7 +5518,7 @@
           <a:lstStyle/>
           <a:p>
             <a:pPr>
-              <a:defRPr sz="1300" b="1">
+              <a:defRPr b="1" sz="1300">
                 <a:solidFill>
                   <a:srgbClr val="4F46E5"/>
                 </a:solidFill>
@@ -5551,7 +5558,7 @@
               </a:spcAft>
             </a:pPr>
             <a:r>
-              <a:rPr sz="1100" b="1">
+              <a:rPr b="1" sz="1100">
                 <a:solidFill>
                   <a:srgbClr val="4F46E5"/>
                 </a:solidFill>
@@ -5559,7 +5566,7 @@
               <a:t>•  </a:t>
             </a:r>
             <a:r>
-              <a:rPr sz="1050" b="1">
+              <a:rPr b="1" sz="1050">
                 <a:solidFill>
                   <a:srgbClr val="0F172A"/>
                 </a:solidFill>
@@ -5572,7 +5579,7 @@
                   <a:srgbClr val="475569"/>
                 </a:solidFill>
               </a:rPr>
-              <a:t>55/55 tests passed cleanly (100% pass rate) across all modules.</a:t>
+              <a:t>73/73 tests passed cleanly (100% pass rate) across all modules.</a:t>
             </a:r>
           </a:p>
           <a:p>
@@ -5582,7 +5589,7 @@
               </a:spcAft>
             </a:pPr>
             <a:r>
-              <a:rPr sz="1100" b="1">
+              <a:rPr b="1" sz="1100">
                 <a:solidFill>
                   <a:srgbClr val="4F46E5"/>
                 </a:solidFill>
@@ -5590,7 +5597,7 @@
               <a:t>•  </a:t>
             </a:r>
             <a:r>
-              <a:rPr sz="1050" b="1">
+              <a:rPr b="1" sz="1050">
                 <a:solidFill>
                   <a:srgbClr val="0F172A"/>
                 </a:solidFill>
@@ -5613,7 +5620,7 @@
               </a:spcAft>
             </a:pPr>
             <a:r>
-              <a:rPr sz="1100" b="1">
+              <a:rPr b="1" sz="1100">
                 <a:solidFill>
                   <a:srgbClr val="4F46E5"/>
                 </a:solidFill>
@@ -5621,7 +5628,7 @@
               <a:t>•  </a:t>
             </a:r>
             <a:r>
-              <a:rPr sz="1050" b="1">
+              <a:rPr b="1" sz="1050">
                 <a:solidFill>
                   <a:srgbClr val="0F172A"/>
                 </a:solidFill>
@@ -5634,7 +5641,7 @@
                   <a:srgbClr val="475569"/>
                 </a:solidFill>
               </a:rPr>
-              <a:t>Sub-50ms trigger response on tactile card clicks and speech synthesis.</a:t>
+              <a:t>Sub-50ms trigger response on tactile card clicks and neural speech synthesis.</a:t>
             </a:r>
           </a:p>
           <a:p>
@@ -5644,7 +5651,7 @@
               </a:spcAft>
             </a:pPr>
             <a:r>
-              <a:rPr sz="1100" b="1">
+              <a:rPr b="1" sz="1100">
                 <a:solidFill>
                   <a:srgbClr val="4F46E5"/>
                 </a:solidFill>
@@ -5652,7 +5659,7 @@
               <a:t>•  </a:t>
             </a:r>
             <a:r>
-              <a:rPr sz="1050" b="1">
+              <a:rPr b="1" sz="1050">
                 <a:solidFill>
                   <a:srgbClr val="0F172A"/>
                 </a:solidFill>
@@ -5665,7 +5672,7 @@
                   <a:srgbClr val="475569"/>
                 </a:solidFill>
               </a:rPr>
-              <a:t>54.89 MB standalone APK with zero external asset streaming dependencies.</a:t>
+              <a:t>Standalone offline APK with zero external server or streaming dependencies.</a:t>
             </a:r>
           </a:p>
           <a:p>
@@ -5675,7 +5682,7 @@
               </a:spcAft>
             </a:pPr>
             <a:r>
-              <a:rPr sz="1100" b="1">
+              <a:rPr b="1" sz="1100">
                 <a:solidFill>
                   <a:srgbClr val="4F46E5"/>
                 </a:solidFill>
@@ -5683,7 +5690,7 @@
               <a:t>•  </a:t>
             </a:r>
             <a:r>
-              <a:rPr sz="1050" b="1">
+              <a:rPr b="1" sz="1050">
                 <a:solidFill>
                   <a:srgbClr val="0F172A"/>
                 </a:solidFill>
@@ -5696,7 +5703,7 @@
                   <a:srgbClr val="475569"/>
                 </a:solidFill>
               </a:rPr>
-              <a:t>100% of modules, audio voices, and stories operational in airplane mode.</a:t>
+              <a:t>100% of modules, neural voices, and stories operational in airplane mode.</a:t>
             </a:r>
           </a:p>
         </p:txBody>
@@ -5743,7 +5750,6 @@
           <a:lstStyle/>
           <a:p>
             <a:pPr algn="ctr"/>
-            <a:endParaRPr/>
           </a:p>
         </p:txBody>
       </p:sp>
@@ -5770,7 +5776,7 @@
           <a:lstStyle/>
           <a:p>
             <a:pPr>
-              <a:defRPr sz="1300" b="1">
+              <a:defRPr b="1" sz="1300">
                 <a:solidFill>
                   <a:srgbClr val="0D9488"/>
                 </a:solidFill>
@@ -5784,7 +5790,7 @@
       </p:sp>
       <p:pic>
         <p:nvPicPr>
-          <p:cNvPr id="10" name="Picture 9" descr="design_reference.jpg"/>
+          <p:cNvPr id="10" name="Picture 9" descr="jaroos_jungle_splash_1789467376903.jpg"/>
           <p:cNvPicPr>
             <a:picLocks noChangeAspect="1"/>
           </p:cNvPicPr>
@@ -5799,7 +5805,7 @@
         <p:spPr>
           <a:xfrm>
             <a:off x="6492240" y="2331720"/>
-            <a:ext cx="2331720" cy="3500999"/>
+            <a:ext cx="2286000" cy="4095750"/>
           </a:xfrm>
           <a:prstGeom prst="rect">
             <a:avLst/>
@@ -5808,7 +5814,7 @@
       </p:pic>
       <p:pic>
         <p:nvPicPr>
-          <p:cNvPr id="11" name="Picture 10" descr="splash_game_bg.jpg"/>
+          <p:cNvPr id="11" name="Picture 10" descr="simulator_character_preview.png"/>
           <p:cNvPicPr>
             <a:picLocks noChangeAspect="1"/>
           </p:cNvPicPr>
@@ -5823,7 +5829,7 @@
         <p:spPr>
           <a:xfrm>
             <a:off x="8961120" y="2331720"/>
-            <a:ext cx="2331720" cy="4177665"/>
+            <a:ext cx="2286000" cy="3061607"/>
           </a:xfrm>
           <a:prstGeom prst="rect">
             <a:avLst/>
@@ -5860,7 +5866,7 @@
               </a:defRPr>
             </a:pPr>
             <a:r>
-              <a:t>Visual UI Showcase: Learning Path, Story Reader &amp; Splash Animation</a:t>
+              <a:t>Visual UI Showcase: 3D Jungle Animated Splash &amp; 3D Interactive Virtual Simulator</a:t>
             </a:r>
           </a:p>
         </p:txBody>
@@ -5874,7 +5880,7 @@
 </file>
 
 <file path=ppt/slides/slide14.xml><?xml version="1.0" encoding="utf-8"?>
-<p:sld xmlns:a="http://schemas.openxmlformats.org/drawingml/2006/main" xmlns:r="http://schemas.openxmlformats.org/officeDocument/2006/relationships" xmlns:p="http://schemas.openxmlformats.org/presentationml/2006/main">
+<p:sld xmlns:a="http://schemas.openxmlformats.org/drawingml/2006/main" xmlns:p="http://schemas.openxmlformats.org/presentationml/2006/main" xmlns:r="http://schemas.openxmlformats.org/officeDocument/2006/relationships">
   <p:cSld>
     <p:spTree>
       <p:nvGrpSpPr>
@@ -5882,14 +5888,7 @@
         <p:cNvGrpSpPr/>
         <p:nvPr/>
       </p:nvGrpSpPr>
-      <p:grpSpPr>
-        <a:xfrm>
-          <a:off x="0" y="0"/>
-          <a:ext cx="0" cy="0"/>
-          <a:chOff x="0" y="0"/>
-          <a:chExt cx="0" cy="0"/>
-        </a:xfrm>
-      </p:grpSpPr>
+      <p:grpSpPr/>
       <p:sp>
         <p:nvSpPr>
           <p:cNvPr id="2" name="Rectangle 1"/>
@@ -5930,7 +5929,6 @@
           <a:lstStyle/>
           <a:p>
             <a:pPr algn="ctr"/>
-            <a:endParaRPr/>
           </a:p>
         </p:txBody>
       </p:sp>
@@ -5972,11 +5970,11 @@
           </a:fontRef>
         </p:style>
         <p:txBody>
-          <a:bodyPr wrap="square" lIns="45720" tIns="9144" rIns="45720" bIns="9144" rtlCol="0" anchor="ctr"/>
+          <a:bodyPr rtlCol="0" anchor="ctr" wrap="square" lIns="45720" rIns="45720" tIns="9144" bIns="9144"/>
           <a:lstStyle/>
           <a:p>
             <a:pPr algn="ctr">
-              <a:defRPr sz="950" b="1">
+              <a:defRPr b="1" sz="950">
                 <a:solidFill>
                   <a:srgbClr val="4F46E5"/>
                 </a:solidFill>
@@ -6011,7 +6009,7 @@
           <a:lstStyle/>
           <a:p>
             <a:pPr>
-              <a:defRPr sz="2200" b="1">
+              <a:defRPr b="1" sz="2200">
                 <a:solidFill>
                   <a:srgbClr val="0F172A"/>
                 </a:solidFill>
@@ -6077,7 +6075,6 @@
           <a:lstStyle/>
           <a:p>
             <a:pPr algn="ctr"/>
-            <a:endParaRPr/>
           </a:p>
         </p:txBody>
       </p:sp>
@@ -6104,7 +6101,7 @@
           <a:lstStyle/>
           <a:p>
             <a:pPr>
-              <a:defRPr sz="1300" b="1">
+              <a:defRPr b="1" sz="1300">
                 <a:solidFill>
                   <a:srgbClr val="4F46E5"/>
                 </a:solidFill>
@@ -6144,7 +6141,7 @@
               </a:spcAft>
             </a:pPr>
             <a:r>
-              <a:rPr sz="1100" b="1">
+              <a:rPr b="1" sz="1100">
                 <a:solidFill>
                   <a:srgbClr val="4F46E5"/>
                 </a:solidFill>
@@ -6152,7 +6149,7 @@
               <a:t>•  </a:t>
             </a:r>
             <a:r>
-              <a:rPr sz="1050" b="1">
+              <a:rPr b="1" sz="1050">
                 <a:solidFill>
                   <a:srgbClr val="0F172A"/>
                 </a:solidFill>
@@ -6175,7 +6172,7 @@
               </a:spcAft>
             </a:pPr>
             <a:r>
-              <a:rPr sz="1100" b="1">
+              <a:rPr b="1" sz="1100">
                 <a:solidFill>
                   <a:srgbClr val="4F46E5"/>
                 </a:solidFill>
@@ -6183,12 +6180,12 @@
               <a:t>•  </a:t>
             </a:r>
             <a:r>
-              <a:rPr sz="1050" b="1">
+              <a:rPr b="1" sz="1050">
                 <a:solidFill>
                   <a:srgbClr val="0F172A"/>
                 </a:solidFill>
               </a:rPr>
-              <a:t>Multi-Companion Voice AI: </a:t>
+              <a:t>100% On-Device Neural TTS: </a:t>
             </a:r>
             <a:r>
               <a:rPr sz="1000">
@@ -6196,7 +6193,7 @@
                   <a:srgbClr val="475569"/>
                 </a:solidFill>
               </a:rPr>
-              <a:t>Replaced robotic monotone with 9 pitch-tuned child companion personas.</a:t>
+              <a:t>Replaced robotic monotone with bundled int8 Piper models via C++ ONNX Runtime.</a:t>
             </a:r>
           </a:p>
           <a:p>
@@ -6206,7 +6203,7 @@
               </a:spcAft>
             </a:pPr>
             <a:r>
-              <a:rPr sz="1100" b="1">
+              <a:rPr b="1" sz="1100">
                 <a:solidFill>
                   <a:srgbClr val="4F46E5"/>
                 </a:solidFill>
@@ -6214,12 +6211,12 @@
               <a:t>•  </a:t>
             </a:r>
             <a:r>
-              <a:rPr sz="1050" b="1">
+              <a:rPr b="1" sz="1050">
                 <a:solidFill>
                   <a:srgbClr val="0F172A"/>
                 </a:solidFill>
               </a:rPr>
-              <a:t>Regional Heritage Preserved: </a:t>
+              <a:t>Interactive 3D Virtual Companion: </a:t>
             </a:r>
             <a:r>
               <a:rPr sz="1000">
@@ -6227,7 +6224,7 @@
                   <a:srgbClr val="475569"/>
                 </a:solidFill>
               </a:rPr>
-              <a:t>Integrated authentic Malayalam moral tales with clean English navigation.</a:t>
+              <a:t>Developed real-time 'Talking Tom' repetition and touch physics.</a:t>
             </a:r>
           </a:p>
           <a:p>
@@ -6237,7 +6234,7 @@
               </a:spcAft>
             </a:pPr>
             <a:r>
-              <a:rPr sz="1100" b="1">
+              <a:rPr b="1" sz="1100">
                 <a:solidFill>
                   <a:srgbClr val="4F46E5"/>
                 </a:solidFill>
@@ -6245,7 +6242,7 @@
               <a:t>•  </a:t>
             </a:r>
             <a:r>
-              <a:rPr sz="1050" b="1">
+              <a:rPr b="1" sz="1050">
                 <a:solidFill>
                   <a:srgbClr val="0F172A"/>
                 </a:solidFill>
@@ -6305,7 +6302,6 @@
           <a:lstStyle/>
           <a:p>
             <a:pPr algn="ctr"/>
-            <a:endParaRPr/>
           </a:p>
         </p:txBody>
       </p:sp>
@@ -6332,7 +6328,7 @@
           <a:lstStyle/>
           <a:p>
             <a:pPr>
-              <a:defRPr sz="1300" b="1">
+              <a:defRPr b="1" sz="1300">
                 <a:solidFill>
                   <a:srgbClr val="0D9488"/>
                 </a:solidFill>
@@ -6372,7 +6368,7 @@
               </a:spcAft>
             </a:pPr>
             <a:r>
-              <a:rPr sz="1100" b="1">
+              <a:rPr b="1" sz="1100">
                 <a:solidFill>
                   <a:srgbClr val="0D9488"/>
                 </a:solidFill>
@@ -6380,7 +6376,7 @@
               <a:t>•  </a:t>
             </a:r>
             <a:r>
-              <a:rPr sz="1050" b="1">
+              <a:rPr b="1" sz="1050">
                 <a:solidFill>
                   <a:srgbClr val="0F172A"/>
                 </a:solidFill>
@@ -6403,7 +6399,7 @@
               </a:spcAft>
             </a:pPr>
             <a:r>
-              <a:rPr sz="1100" b="1">
+              <a:rPr b="1" sz="1100">
                 <a:solidFill>
                   <a:srgbClr val="0D9488"/>
                 </a:solidFill>
@@ -6411,12 +6407,12 @@
               <a:t>•  </a:t>
             </a:r>
             <a:r>
-              <a:rPr sz="1050" b="1">
+              <a:rPr b="1" sz="1050">
                 <a:solidFill>
                   <a:srgbClr val="0F172A"/>
                 </a:solidFill>
               </a:rPr>
-              <a:t>Zero Ad Intrusions: </a:t>
+              <a:t>Zero Server &amp; Cloud Overhead: </a:t>
             </a:r>
             <a:r>
               <a:rPr sz="1000">
@@ -6424,7 +6420,7 @@
                   <a:srgbClr val="475569"/>
                 </a:solidFill>
               </a:rPr>
-              <a:t>100% ad-free, secure, and privacy-first environment for children.</a:t>
+              <a:t>Fully autonomous offline mobile architecture running on device CPU.</a:t>
             </a:r>
           </a:p>
           <a:p>
@@ -6434,7 +6430,7 @@
               </a:spcAft>
             </a:pPr>
             <a:r>
-              <a:rPr sz="1100" b="1">
+              <a:rPr b="1" sz="1100">
                 <a:solidFill>
                   <a:srgbClr val="0D9488"/>
                 </a:solidFill>
@@ -6442,12 +6438,12 @@
               <a:t>•  </a:t>
             </a:r>
             <a:r>
-              <a:rPr sz="1050" b="1">
+              <a:rPr b="1" sz="1050">
                 <a:solidFill>
                   <a:srgbClr val="0F172A"/>
                 </a:solidFill>
               </a:rPr>
-              <a:t>Zero Internet Dependency: </a:t>
+              <a:t>Cultural Preservation: </a:t>
             </a:r>
             <a:r>
               <a:rPr sz="1000">
@@ -6455,7 +6451,7 @@
                   <a:srgbClr val="475569"/>
                 </a:solidFill>
               </a:rPr>
-              <a:t>Completely self-contained 54.89 MB APK running offline.</a:t>
+              <a:t>Integrated authentic Malayalam bedtime stories with native phonetics.</a:t>
             </a:r>
           </a:p>
           <a:p>
@@ -6465,7 +6461,7 @@
               </a:spcAft>
             </a:pPr>
             <a:r>
-              <a:rPr sz="1100" b="1">
+              <a:rPr b="1" sz="1100">
                 <a:solidFill>
                   <a:srgbClr val="0D9488"/>
                 </a:solidFill>
@@ -6473,7 +6469,7 @@
               <a:t>•  </a:t>
             </a:r>
             <a:r>
-              <a:rPr sz="1050" b="1">
+              <a:rPr b="1" sz="1050">
                 <a:solidFill>
                   <a:srgbClr val="0F172A"/>
                 </a:solidFill>
@@ -6486,7 +6482,7 @@
                   <a:srgbClr val="475569"/>
                 </a:solidFill>
               </a:rPr>
-              <a:t>All 55 automated unit/widget tests passing with zero layout overflows.</a:t>
+              <a:t>All 73 automated tests passing, production release v1.4.0 deployed to GitHub.</a:t>
             </a:r>
           </a:p>
         </p:txBody>
@@ -6533,7 +6529,6 @@
           <a:lstStyle/>
           <a:p>
             <a:pPr algn="ctr"/>
-            <a:endParaRPr/>
           </a:p>
         </p:txBody>
       </p:sp>
@@ -6560,7 +6555,7 @@
           <a:lstStyle/>
           <a:p>
             <a:pPr>
-              <a:defRPr sz="1300" b="1">
+              <a:defRPr b="1" sz="1300">
                 <a:solidFill>
                   <a:srgbClr val="D97706"/>
                 </a:solidFill>
@@ -6600,7 +6595,7 @@
               </a:spcAft>
             </a:pPr>
             <a:r>
-              <a:rPr sz="1100" b="1">
+              <a:rPr b="1" sz="1100">
                 <a:solidFill>
                   <a:srgbClr val="D97706"/>
                 </a:solidFill>
@@ -6608,7 +6603,7 @@
               <a:t>•  </a:t>
             </a:r>
             <a:r>
-              <a:rPr sz="1050" b="1">
+              <a:rPr b="1" sz="1050">
                 <a:solidFill>
                   <a:srgbClr val="0F172A"/>
                 </a:solidFill>
@@ -6631,7 +6626,7 @@
               </a:spcAft>
             </a:pPr>
             <a:r>
-              <a:rPr sz="1100" b="1">
+              <a:rPr b="1" sz="1100">
                 <a:solidFill>
                   <a:srgbClr val="D97706"/>
                 </a:solidFill>
@@ -6639,7 +6634,7 @@
               <a:t>•  </a:t>
             </a:r>
             <a:r>
-              <a:rPr sz="1050" b="1">
+              <a:rPr b="1" sz="1050">
                 <a:solidFill>
                   <a:srgbClr val="0F172A"/>
                 </a:solidFill>
@@ -6662,7 +6657,7 @@
               </a:spcAft>
             </a:pPr>
             <a:r>
-              <a:rPr sz="1100" b="1">
+              <a:rPr b="1" sz="1100">
                 <a:solidFill>
                   <a:srgbClr val="D97706"/>
                 </a:solidFill>
@@ -6670,7 +6665,7 @@
               <a:t>•  </a:t>
             </a:r>
             <a:r>
-              <a:rPr sz="1050" b="1">
+              <a:rPr b="1" sz="1050">
                 <a:solidFill>
                   <a:srgbClr val="0F172A"/>
                 </a:solidFill>
@@ -6693,7 +6688,7 @@
               </a:spcAft>
             </a:pPr>
             <a:r>
-              <a:rPr sz="1100" b="1">
+              <a:rPr b="1" sz="1100">
                 <a:solidFill>
                   <a:srgbClr val="D97706"/>
                 </a:solidFill>
@@ -6701,7 +6696,7 @@
               <a:t>•  </a:t>
             </a:r>
             <a:r>
-              <a:rPr sz="1050" b="1">
+              <a:rPr b="1" sz="1050">
                 <a:solidFill>
                   <a:srgbClr val="0F172A"/>
                 </a:solidFill>
@@ -6728,7 +6723,7 @@
 </file>
 
 <file path=ppt/slides/slide15.xml><?xml version="1.0" encoding="utf-8"?>
-<p:sld xmlns:a="http://schemas.openxmlformats.org/drawingml/2006/main" xmlns:r="http://schemas.openxmlformats.org/officeDocument/2006/relationships" xmlns:p="http://schemas.openxmlformats.org/presentationml/2006/main">
+<p:sld xmlns:a="http://schemas.openxmlformats.org/drawingml/2006/main" xmlns:p="http://schemas.openxmlformats.org/presentationml/2006/main" xmlns:r="http://schemas.openxmlformats.org/officeDocument/2006/relationships">
   <p:cSld>
     <p:spTree>
       <p:nvGrpSpPr>
@@ -6736,14 +6731,7 @@
         <p:cNvGrpSpPr/>
         <p:nvPr/>
       </p:nvGrpSpPr>
-      <p:grpSpPr>
-        <a:xfrm>
-          <a:off x="0" y="0"/>
-          <a:ext cx="0" cy="0"/>
-          <a:chOff x="0" y="0"/>
-          <a:chExt cx="0" cy="0"/>
-        </a:xfrm>
-      </p:grpSpPr>
+      <p:grpSpPr/>
       <p:sp>
         <p:nvSpPr>
           <p:cNvPr id="2" name="Rectangle 1"/>
@@ -6784,7 +6772,6 @@
           <a:lstStyle/>
           <a:p>
             <a:pPr algn="ctr"/>
-            <a:endParaRPr/>
           </a:p>
         </p:txBody>
       </p:sp>
@@ -6826,11 +6813,11 @@
           </a:fontRef>
         </p:style>
         <p:txBody>
-          <a:bodyPr wrap="square" lIns="45720" tIns="9144" rIns="45720" bIns="9144" rtlCol="0" anchor="ctr"/>
+          <a:bodyPr rtlCol="0" anchor="ctr" wrap="square" lIns="45720" rIns="45720" tIns="9144" bIns="9144"/>
           <a:lstStyle/>
           <a:p>
             <a:pPr algn="ctr">
-              <a:defRPr sz="950" b="1">
+              <a:defRPr b="1" sz="950">
                 <a:solidFill>
                   <a:srgbClr val="4F46E5"/>
                 </a:solidFill>
@@ -6865,7 +6852,7 @@
           <a:lstStyle/>
           <a:p>
             <a:pPr>
-              <a:defRPr sz="2200" b="1">
+              <a:defRPr b="1" sz="2200">
                 <a:solidFill>
                   <a:srgbClr val="0F172A"/>
                 </a:solidFill>
@@ -6931,7 +6918,6 @@
           <a:lstStyle/>
           <a:p>
             <a:pPr algn="ctr"/>
-            <a:endParaRPr/>
           </a:p>
         </p:txBody>
       </p:sp>
@@ -6958,7 +6944,7 @@
           <a:lstStyle/>
           <a:p>
             <a:pPr>
-              <a:defRPr sz="1300" b="1">
+              <a:defRPr b="1" sz="1300">
                 <a:solidFill>
                   <a:srgbClr val="4F46E5"/>
                 </a:solidFill>
@@ -6998,7 +6984,7 @@
               </a:spcAft>
             </a:pPr>
             <a:r>
-              <a:rPr sz="1100" b="1">
+              <a:rPr b="1" sz="1100">
                 <a:solidFill>
                   <a:srgbClr val="4F46E5"/>
                 </a:solidFill>
@@ -7006,7 +6992,7 @@
               <a:t>•  </a:t>
             </a:r>
             <a:r>
-              <a:rPr sz="1050" b="1">
+              <a:rPr b="1" sz="1050">
                 <a:solidFill>
                   <a:srgbClr val="0F172A"/>
                 </a:solidFill>
@@ -7029,7 +7015,7 @@
               </a:spcAft>
             </a:pPr>
             <a:r>
-              <a:rPr sz="1100" b="1">
+              <a:rPr b="1" sz="1100">
                 <a:solidFill>
                   <a:srgbClr val="4F46E5"/>
                 </a:solidFill>
@@ -7037,7 +7023,7 @@
               <a:t>•  </a:t>
             </a:r>
             <a:r>
-              <a:rPr sz="1050" b="1">
+              <a:rPr b="1" sz="1050">
                 <a:solidFill>
                   <a:srgbClr val="0F172A"/>
                 </a:solidFill>
@@ -7060,7 +7046,7 @@
               </a:spcAft>
             </a:pPr>
             <a:r>
-              <a:rPr sz="1100" b="1">
+              <a:rPr b="1" sz="1100">
                 <a:solidFill>
                   <a:srgbClr val="4F46E5"/>
                 </a:solidFill>
@@ -7068,7 +7054,7 @@
               <a:t>•  </a:t>
             </a:r>
             <a:r>
-              <a:rPr sz="1050" b="1">
+              <a:rPr b="1" sz="1050">
                 <a:solidFill>
                   <a:srgbClr val="0F172A"/>
                 </a:solidFill>
@@ -7091,7 +7077,7 @@
               </a:spcAft>
             </a:pPr>
             <a:r>
-              <a:rPr sz="1100" b="1">
+              <a:rPr b="1" sz="1100">
                 <a:solidFill>
                   <a:srgbClr val="4F46E5"/>
                 </a:solidFill>
@@ -7099,7 +7085,7 @@
               <a:t>•  </a:t>
             </a:r>
             <a:r>
-              <a:rPr sz="1050" b="1">
+              <a:rPr b="1" sz="1050">
                 <a:solidFill>
                   <a:srgbClr val="0F172A"/>
                 </a:solidFill>
@@ -7159,7 +7145,6 @@
           <a:lstStyle/>
           <a:p>
             <a:pPr algn="ctr"/>
-            <a:endParaRPr/>
           </a:p>
         </p:txBody>
       </p:sp>
@@ -7186,7 +7171,7 @@
           <a:lstStyle/>
           <a:p>
             <a:pPr>
-              <a:defRPr sz="1300" b="1">
+              <a:defRPr b="1" sz="1300">
                 <a:solidFill>
                   <a:srgbClr val="0D9488"/>
                 </a:solidFill>
@@ -7226,7 +7211,7 @@
               </a:spcAft>
             </a:pPr>
             <a:r>
-              <a:rPr sz="1100" b="1">
+              <a:rPr b="1" sz="1100">
                 <a:solidFill>
                   <a:srgbClr val="0D9488"/>
                 </a:solidFill>
@@ -7234,7 +7219,7 @@
               <a:t>•  </a:t>
             </a:r>
             <a:r>
-              <a:rPr sz="1050" b="1">
+              <a:rPr b="1" sz="1050">
                 <a:solidFill>
                   <a:srgbClr val="0F172A"/>
                 </a:solidFill>
@@ -7257,7 +7242,7 @@
               </a:spcAft>
             </a:pPr>
             <a:r>
-              <a:rPr sz="1100" b="1">
+              <a:rPr b="1" sz="1100">
                 <a:solidFill>
                   <a:srgbClr val="0D9488"/>
                 </a:solidFill>
@@ -7265,7 +7250,7 @@
               <a:t>•  </a:t>
             </a:r>
             <a:r>
-              <a:rPr sz="1050" b="1">
+              <a:rPr b="1" sz="1050">
                 <a:solidFill>
                   <a:srgbClr val="0F172A"/>
                 </a:solidFill>
@@ -7288,7 +7273,7 @@
               </a:spcAft>
             </a:pPr>
             <a:r>
-              <a:rPr sz="1100" b="1">
+              <a:rPr b="1" sz="1100">
                 <a:solidFill>
                   <a:srgbClr val="0D9488"/>
                 </a:solidFill>
@@ -7296,7 +7281,7 @@
               <a:t>•  </a:t>
             </a:r>
             <a:r>
-              <a:rPr sz="1050" b="1">
+              <a:rPr b="1" sz="1050">
                 <a:solidFill>
                   <a:srgbClr val="0F172A"/>
                 </a:solidFill>
@@ -7356,7 +7341,6 @@
           <a:lstStyle/>
           <a:p>
             <a:pPr algn="ctr"/>
-            <a:endParaRPr/>
           </a:p>
         </p:txBody>
       </p:sp>
@@ -7383,7 +7367,7 @@
           <a:lstStyle/>
           <a:p>
             <a:pPr>
-              <a:defRPr sz="1300" b="1">
+              <a:defRPr b="1" sz="1300">
                 <a:solidFill>
                   <a:srgbClr val="D97706"/>
                 </a:solidFill>
@@ -7423,7 +7407,7 @@
               </a:spcAft>
             </a:pPr>
             <a:r>
-              <a:rPr sz="1100" b="1">
+              <a:rPr b="1" sz="1100">
                 <a:solidFill>
                   <a:srgbClr val="D97706"/>
                 </a:solidFill>
@@ -7431,7 +7415,7 @@
               <a:t>•  </a:t>
             </a:r>
             <a:r>
-              <a:rPr sz="1050" b="1">
+              <a:rPr b="1" sz="1050">
                 <a:solidFill>
                   <a:srgbClr val="0F172A"/>
                 </a:solidFill>
@@ -7454,7 +7438,7 @@
               </a:spcAft>
             </a:pPr>
             <a:r>
-              <a:rPr sz="1100" b="1">
+              <a:rPr b="1" sz="1100">
                 <a:solidFill>
                   <a:srgbClr val="D97706"/>
                 </a:solidFill>
@@ -7462,7 +7446,7 @@
               <a:t>•  </a:t>
             </a:r>
             <a:r>
-              <a:rPr sz="1050" b="1">
+              <a:rPr b="1" sz="1050">
                 <a:solidFill>
                   <a:srgbClr val="0F172A"/>
                 </a:solidFill>
@@ -7485,7 +7469,7 @@
               </a:spcAft>
             </a:pPr>
             <a:r>
-              <a:rPr sz="1100" b="1">
+              <a:rPr b="1" sz="1100">
                 <a:solidFill>
                   <a:srgbClr val="D97706"/>
                 </a:solidFill>
@@ -7493,7 +7477,7 @@
               <a:t>•  </a:t>
             </a:r>
             <a:r>
-              <a:rPr sz="1050" b="1">
+              <a:rPr b="1" sz="1050">
                 <a:solidFill>
                   <a:srgbClr val="0F172A"/>
                 </a:solidFill>
@@ -7520,7 +7504,7 @@
 </file>
 
 <file path=ppt/slides/slide2.xml><?xml version="1.0" encoding="utf-8"?>
-<p:sld xmlns:a="http://schemas.openxmlformats.org/drawingml/2006/main" xmlns:r="http://schemas.openxmlformats.org/officeDocument/2006/relationships" xmlns:p="http://schemas.openxmlformats.org/presentationml/2006/main">
+<p:sld xmlns:a="http://schemas.openxmlformats.org/drawingml/2006/main" xmlns:p="http://schemas.openxmlformats.org/presentationml/2006/main" xmlns:r="http://schemas.openxmlformats.org/officeDocument/2006/relationships">
   <p:cSld>
     <p:spTree>
       <p:nvGrpSpPr>
@@ -7528,14 +7512,7 @@
         <p:cNvGrpSpPr/>
         <p:nvPr/>
       </p:nvGrpSpPr>
-      <p:grpSpPr>
-        <a:xfrm>
-          <a:off x="0" y="0"/>
-          <a:ext cx="0" cy="0"/>
-          <a:chOff x="0" y="0"/>
-          <a:chExt cx="0" cy="0"/>
-        </a:xfrm>
-      </p:grpSpPr>
+      <p:grpSpPr/>
       <p:sp>
         <p:nvSpPr>
           <p:cNvPr id="2" name="Rectangle 1"/>
@@ -7576,7 +7553,6 @@
           <a:lstStyle/>
           <a:p>
             <a:pPr algn="ctr"/>
-            <a:endParaRPr/>
           </a:p>
         </p:txBody>
       </p:sp>
@@ -7618,11 +7594,11 @@
           </a:fontRef>
         </p:style>
         <p:txBody>
-          <a:bodyPr wrap="square" lIns="45720" tIns="9144" rIns="45720" bIns="9144" rtlCol="0" anchor="ctr"/>
+          <a:bodyPr rtlCol="0" anchor="ctr" wrap="square" lIns="45720" rIns="45720" tIns="9144" bIns="9144"/>
           <a:lstStyle/>
           <a:p>
             <a:pPr algn="ctr">
-              <a:defRPr sz="950" b="1">
+              <a:defRPr b="1" sz="950">
                 <a:solidFill>
                   <a:srgbClr val="4F46E5"/>
                 </a:solidFill>
@@ -7657,7 +7633,7 @@
           <a:lstStyle/>
           <a:p>
             <a:pPr>
-              <a:defRPr sz="2200" b="1">
+              <a:defRPr b="1" sz="2200">
                 <a:solidFill>
                   <a:srgbClr val="0F172A"/>
                 </a:solidFill>
@@ -7723,7 +7699,6 @@
           <a:lstStyle/>
           <a:p>
             <a:pPr algn="ctr"/>
-            <a:endParaRPr/>
           </a:p>
         </p:txBody>
       </p:sp>
@@ -7750,7 +7725,7 @@
           <a:lstStyle/>
           <a:p>
             <a:pPr>
-              <a:defRPr sz="1150" b="1">
+              <a:defRPr b="1" sz="1150">
                 <a:solidFill>
                   <a:srgbClr val="4F46E5"/>
                 </a:solidFill>
@@ -7816,7 +7791,6 @@
           <a:lstStyle/>
           <a:p>
             <a:pPr algn="ctr"/>
-            <a:endParaRPr/>
           </a:p>
         </p:txBody>
       </p:sp>
@@ -7843,7 +7817,7 @@
           <a:lstStyle/>
           <a:p>
             <a:pPr>
-              <a:defRPr sz="1150" b="1">
+              <a:defRPr b="1" sz="1150">
                 <a:solidFill>
                   <a:srgbClr val="4F46E5"/>
                 </a:solidFill>
@@ -7909,7 +7883,6 @@
           <a:lstStyle/>
           <a:p>
             <a:pPr algn="ctr"/>
-            <a:endParaRPr/>
           </a:p>
         </p:txBody>
       </p:sp>
@@ -7936,7 +7909,7 @@
           <a:lstStyle/>
           <a:p>
             <a:pPr>
-              <a:defRPr sz="1150" b="1">
+              <a:defRPr b="1" sz="1150">
                 <a:solidFill>
                   <a:srgbClr val="4F46E5"/>
                 </a:solidFill>
@@ -8002,7 +7975,6 @@
           <a:lstStyle/>
           <a:p>
             <a:pPr algn="ctr"/>
-            <a:endParaRPr/>
           </a:p>
         </p:txBody>
       </p:sp>
@@ -8029,7 +8001,7 @@
           <a:lstStyle/>
           <a:p>
             <a:pPr>
-              <a:defRPr sz="1150" b="1">
+              <a:defRPr b="1" sz="1150">
                 <a:solidFill>
                   <a:srgbClr val="4F46E5"/>
                 </a:solidFill>
@@ -8095,7 +8067,6 @@
           <a:lstStyle/>
           <a:p>
             <a:pPr algn="ctr"/>
-            <a:endParaRPr/>
           </a:p>
         </p:txBody>
       </p:sp>
@@ -8122,7 +8093,7 @@
           <a:lstStyle/>
           <a:p>
             <a:pPr>
-              <a:defRPr sz="1150" b="1">
+              <a:defRPr b="1" sz="1150">
                 <a:solidFill>
                   <a:srgbClr val="4F46E5"/>
                 </a:solidFill>
@@ -8188,7 +8159,6 @@
           <a:lstStyle/>
           <a:p>
             <a:pPr algn="ctr"/>
-            <a:endParaRPr/>
           </a:p>
         </p:txBody>
       </p:sp>
@@ -8215,7 +8185,7 @@
           <a:lstStyle/>
           <a:p>
             <a:pPr>
-              <a:defRPr sz="1150" b="1">
+              <a:defRPr b="1" sz="1150">
                 <a:solidFill>
                   <a:srgbClr val="4F46E5"/>
                 </a:solidFill>
@@ -8281,7 +8251,6 @@
           <a:lstStyle/>
           <a:p>
             <a:pPr algn="ctr"/>
-            <a:endParaRPr/>
           </a:p>
         </p:txBody>
       </p:sp>
@@ -8308,7 +8277,7 @@
           <a:lstStyle/>
           <a:p>
             <a:pPr>
-              <a:defRPr sz="1150" b="1">
+              <a:defRPr b="1" sz="1150">
                 <a:solidFill>
                   <a:srgbClr val="4F46E5"/>
                 </a:solidFill>
@@ -8374,7 +8343,6 @@
           <a:lstStyle/>
           <a:p>
             <a:pPr algn="ctr"/>
-            <a:endParaRPr/>
           </a:p>
         </p:txBody>
       </p:sp>
@@ -8401,7 +8369,7 @@
           <a:lstStyle/>
           <a:p>
             <a:pPr>
-              <a:defRPr sz="1150" b="1">
+              <a:defRPr b="1" sz="1150">
                 <a:solidFill>
                   <a:srgbClr val="4F46E5"/>
                 </a:solidFill>
@@ -8467,7 +8435,6 @@
           <a:lstStyle/>
           <a:p>
             <a:pPr algn="ctr"/>
-            <a:endParaRPr/>
           </a:p>
         </p:txBody>
       </p:sp>
@@ -8494,7 +8461,7 @@
           <a:lstStyle/>
           <a:p>
             <a:pPr>
-              <a:defRPr sz="1150" b="1">
+              <a:defRPr b="1" sz="1150">
                 <a:solidFill>
                   <a:srgbClr val="4F46E5"/>
                 </a:solidFill>
@@ -8513,7 +8480,7 @@
               </a:defRPr>
             </a:pPr>
             <a:r>
-              <a:t>Test validation (55/55 passed) and UI.</a:t>
+              <a:t>Test validation (73/73 passed) and UI.</a:t>
             </a:r>
           </a:p>
         </p:txBody>
@@ -8560,7 +8527,6 @@
           <a:lstStyle/>
           <a:p>
             <a:pPr algn="ctr"/>
-            <a:endParaRPr/>
           </a:p>
         </p:txBody>
       </p:sp>
@@ -8587,7 +8553,7 @@
           <a:lstStyle/>
           <a:p>
             <a:pPr>
-              <a:defRPr sz="1150" b="1">
+              <a:defRPr b="1" sz="1150">
                 <a:solidFill>
                   <a:srgbClr val="4F46E5"/>
                 </a:solidFill>
@@ -8653,7 +8619,6 @@
           <a:lstStyle/>
           <a:p>
             <a:pPr algn="ctr"/>
-            <a:endParaRPr/>
           </a:p>
         </p:txBody>
       </p:sp>
@@ -8680,7 +8645,7 @@
           <a:lstStyle/>
           <a:p>
             <a:pPr>
-              <a:defRPr sz="1150" b="1">
+              <a:defRPr b="1" sz="1150">
                 <a:solidFill>
                   <a:srgbClr val="4F46E5"/>
                 </a:solidFill>
@@ -8713,7 +8678,7 @@
 </file>
 
 <file path=ppt/slides/slide3.xml><?xml version="1.0" encoding="utf-8"?>
-<p:sld xmlns:a="http://schemas.openxmlformats.org/drawingml/2006/main" xmlns:r="http://schemas.openxmlformats.org/officeDocument/2006/relationships" xmlns:p="http://schemas.openxmlformats.org/presentationml/2006/main">
+<p:sld xmlns:a="http://schemas.openxmlformats.org/drawingml/2006/main" xmlns:p="http://schemas.openxmlformats.org/presentationml/2006/main" xmlns:r="http://schemas.openxmlformats.org/officeDocument/2006/relationships">
   <p:cSld>
     <p:spTree>
       <p:nvGrpSpPr>
@@ -8721,14 +8686,7 @@
         <p:cNvGrpSpPr/>
         <p:nvPr/>
       </p:nvGrpSpPr>
-      <p:grpSpPr>
-        <a:xfrm>
-          <a:off x="0" y="0"/>
-          <a:ext cx="0" cy="0"/>
-          <a:chOff x="0" y="0"/>
-          <a:chExt cx="0" cy="0"/>
-        </a:xfrm>
-      </p:grpSpPr>
+      <p:grpSpPr/>
       <p:sp>
         <p:nvSpPr>
           <p:cNvPr id="2" name="Rectangle 1"/>
@@ -8769,7 +8727,6 @@
           <a:lstStyle/>
           <a:p>
             <a:pPr algn="ctr"/>
-            <a:endParaRPr/>
           </a:p>
         </p:txBody>
       </p:sp>
@@ -8811,11 +8768,11 @@
           </a:fontRef>
         </p:style>
         <p:txBody>
-          <a:bodyPr wrap="square" lIns="45720" tIns="9144" rIns="45720" bIns="9144" rtlCol="0" anchor="ctr"/>
+          <a:bodyPr rtlCol="0" anchor="ctr" wrap="square" lIns="45720" rIns="45720" tIns="9144" bIns="9144"/>
           <a:lstStyle/>
           <a:p>
             <a:pPr algn="ctr">
-              <a:defRPr sz="950" b="1">
+              <a:defRPr b="1" sz="950">
                 <a:solidFill>
                   <a:srgbClr val="4F46E5"/>
                 </a:solidFill>
@@ -8850,7 +8807,7 @@
           <a:lstStyle/>
           <a:p>
             <a:pPr>
-              <a:defRPr sz="2200" b="1">
+              <a:defRPr b="1" sz="2200">
                 <a:solidFill>
                   <a:srgbClr val="0F172A"/>
                 </a:solidFill>
@@ -8916,7 +8873,6 @@
           <a:lstStyle/>
           <a:p>
             <a:pPr algn="ctr"/>
-            <a:endParaRPr/>
           </a:p>
         </p:txBody>
       </p:sp>
@@ -8943,7 +8899,7 @@
           <a:lstStyle/>
           <a:p>
             <a:pPr>
-              <a:defRPr sz="1300" b="1">
+              <a:defRPr b="1" sz="1300">
                 <a:solidFill>
                   <a:srgbClr val="4F46E5"/>
                 </a:solidFill>
@@ -8983,7 +8939,7 @@
               </a:spcAft>
             </a:pPr>
             <a:r>
-              <a:rPr sz="1100" b="1">
+              <a:rPr b="1" sz="1100">
                 <a:solidFill>
                   <a:srgbClr val="4F46E5"/>
                 </a:solidFill>
@@ -8991,7 +8947,7 @@
               <a:t>•  </a:t>
             </a:r>
             <a:r>
-              <a:rPr sz="1050" b="1">
+              <a:rPr b="1" sz="1050">
                 <a:solidFill>
                   <a:srgbClr val="0F172A"/>
                 </a:solidFill>
@@ -9014,7 +8970,7 @@
               </a:spcAft>
             </a:pPr>
             <a:r>
-              <a:rPr sz="1100" b="1">
+              <a:rPr b="1" sz="1100">
                 <a:solidFill>
                   <a:srgbClr val="4F46E5"/>
                 </a:solidFill>
@@ -9022,7 +8978,7 @@
               <a:t>•  </a:t>
             </a:r>
             <a:r>
-              <a:rPr sz="1050" b="1">
+              <a:rPr b="1" sz="1050">
                 <a:solidFill>
                   <a:srgbClr val="0F172A"/>
                 </a:solidFill>
@@ -9045,7 +9001,7 @@
               </a:spcAft>
             </a:pPr>
             <a:r>
-              <a:rPr sz="1100" b="1">
+              <a:rPr b="1" sz="1100">
                 <a:solidFill>
                   <a:srgbClr val="4F46E5"/>
                 </a:solidFill>
@@ -9053,7 +9009,7 @@
               <a:t>•  </a:t>
             </a:r>
             <a:r>
-              <a:rPr sz="1050" b="1">
+              <a:rPr b="1" sz="1050">
                 <a:solidFill>
                   <a:srgbClr val="0F172A"/>
                 </a:solidFill>
@@ -9076,7 +9032,7 @@
               </a:spcAft>
             </a:pPr>
             <a:r>
-              <a:rPr sz="1100" b="1">
+              <a:rPr b="1" sz="1100">
                 <a:solidFill>
                   <a:srgbClr val="4F46E5"/>
                 </a:solidFill>
@@ -9084,7 +9040,7 @@
               <a:t>•  </a:t>
             </a:r>
             <a:r>
-              <a:rPr sz="1050" b="1">
+              <a:rPr b="1" sz="1050">
                 <a:solidFill>
                   <a:srgbClr val="0F172A"/>
                 </a:solidFill>
@@ -9144,7 +9100,6 @@
           <a:lstStyle/>
           <a:p>
             <a:pPr algn="ctr"/>
-            <a:endParaRPr/>
           </a:p>
         </p:txBody>
       </p:sp>
@@ -9171,7 +9126,7 @@
           <a:lstStyle/>
           <a:p>
             <a:pPr>
-              <a:defRPr sz="1300" b="1">
+              <a:defRPr b="1" sz="1300">
                 <a:solidFill>
                   <a:srgbClr val="E11D48"/>
                 </a:solidFill>
@@ -9211,7 +9166,7 @@
               </a:spcAft>
             </a:pPr>
             <a:r>
-              <a:rPr sz="1100" b="1">
+              <a:rPr b="1" sz="1100">
                 <a:solidFill>
                   <a:srgbClr val="E11D48"/>
                 </a:solidFill>
@@ -9219,7 +9174,7 @@
               <a:t>•  </a:t>
             </a:r>
             <a:r>
-              <a:rPr sz="1050" b="1">
+              <a:rPr b="1" sz="1050">
                 <a:solidFill>
                   <a:srgbClr val="0F172A"/>
                 </a:solidFill>
@@ -9242,7 +9197,7 @@
               </a:spcAft>
             </a:pPr>
             <a:r>
-              <a:rPr sz="1100" b="1">
+              <a:rPr b="1" sz="1100">
                 <a:solidFill>
                   <a:srgbClr val="E11D48"/>
                 </a:solidFill>
@@ -9250,7 +9205,7 @@
               <a:t>•  </a:t>
             </a:r>
             <a:r>
-              <a:rPr sz="1050" b="1">
+              <a:rPr b="1" sz="1050">
                 <a:solidFill>
                   <a:srgbClr val="0F172A"/>
                 </a:solidFill>
@@ -9273,7 +9228,7 @@
               </a:spcAft>
             </a:pPr>
             <a:r>
-              <a:rPr sz="1100" b="1">
+              <a:rPr b="1" sz="1100">
                 <a:solidFill>
                   <a:srgbClr val="E11D48"/>
                 </a:solidFill>
@@ -9281,7 +9236,7 @@
               <a:t>•  </a:t>
             </a:r>
             <a:r>
-              <a:rPr sz="1050" b="1">
+              <a:rPr b="1" sz="1050">
                 <a:solidFill>
                   <a:srgbClr val="0F172A"/>
                 </a:solidFill>
@@ -9304,7 +9259,7 @@
               </a:spcAft>
             </a:pPr>
             <a:r>
-              <a:rPr sz="1100" b="1">
+              <a:rPr b="1" sz="1100">
                 <a:solidFill>
                   <a:srgbClr val="E11D48"/>
                 </a:solidFill>
@@ -9312,7 +9267,7 @@
               <a:t>•  </a:t>
             </a:r>
             <a:r>
-              <a:rPr sz="1050" b="1">
+              <a:rPr b="1" sz="1050">
                 <a:solidFill>
                   <a:srgbClr val="0F172A"/>
                 </a:solidFill>
@@ -9372,7 +9327,6 @@
           <a:lstStyle/>
           <a:p>
             <a:pPr algn="ctr"/>
-            <a:endParaRPr/>
           </a:p>
         </p:txBody>
       </p:sp>
@@ -9399,7 +9353,7 @@
           <a:lstStyle/>
           <a:p>
             <a:pPr>
-              <a:defRPr sz="1300" b="1">
+              <a:defRPr b="1" sz="1300">
                 <a:solidFill>
                   <a:srgbClr val="0D9488"/>
                 </a:solidFill>
@@ -9439,7 +9393,7 @@
               </a:spcAft>
             </a:pPr>
             <a:r>
-              <a:rPr sz="1100" b="1">
+              <a:rPr b="1" sz="1100">
                 <a:solidFill>
                   <a:srgbClr val="0D9488"/>
                 </a:solidFill>
@@ -9447,7 +9401,7 @@
               <a:t>•  </a:t>
             </a:r>
             <a:r>
-              <a:rPr sz="1050" b="1">
+              <a:rPr b="1" sz="1050">
                 <a:solidFill>
                   <a:srgbClr val="0F172A"/>
                 </a:solidFill>
@@ -9470,7 +9424,7 @@
               </a:spcAft>
             </a:pPr>
             <a:r>
-              <a:rPr sz="1100" b="1">
+              <a:rPr b="1" sz="1100">
                 <a:solidFill>
                   <a:srgbClr val="0D9488"/>
                 </a:solidFill>
@@ -9478,7 +9432,7 @@
               <a:t>•  </a:t>
             </a:r>
             <a:r>
-              <a:rPr sz="1050" b="1">
+              <a:rPr b="1" sz="1050">
                 <a:solidFill>
                   <a:srgbClr val="0F172A"/>
                 </a:solidFill>
@@ -9501,7 +9455,7 @@
               </a:spcAft>
             </a:pPr>
             <a:r>
-              <a:rPr sz="1100" b="1">
+              <a:rPr b="1" sz="1100">
                 <a:solidFill>
                   <a:srgbClr val="0D9488"/>
                 </a:solidFill>
@@ -9509,7 +9463,7 @@
               <a:t>•  </a:t>
             </a:r>
             <a:r>
-              <a:rPr sz="1050" b="1">
+              <a:rPr b="1" sz="1050">
                 <a:solidFill>
                   <a:srgbClr val="0F172A"/>
                 </a:solidFill>
@@ -9532,7 +9486,7 @@
               </a:spcAft>
             </a:pPr>
             <a:r>
-              <a:rPr sz="1100" b="1">
+              <a:rPr b="1" sz="1100">
                 <a:solidFill>
                   <a:srgbClr val="0D9488"/>
                 </a:solidFill>
@@ -9540,7 +9494,7 @@
               <a:t>•  </a:t>
             </a:r>
             <a:r>
-              <a:rPr sz="1050" b="1">
+              <a:rPr b="1" sz="1050">
                 <a:solidFill>
                   <a:srgbClr val="0F172A"/>
                 </a:solidFill>
@@ -9567,7 +9521,7 @@
 </file>
 
 <file path=ppt/slides/slide4.xml><?xml version="1.0" encoding="utf-8"?>
-<p:sld xmlns:a="http://schemas.openxmlformats.org/drawingml/2006/main" xmlns:r="http://schemas.openxmlformats.org/officeDocument/2006/relationships" xmlns:p="http://schemas.openxmlformats.org/presentationml/2006/main">
+<p:sld xmlns:a="http://schemas.openxmlformats.org/drawingml/2006/main" xmlns:p="http://schemas.openxmlformats.org/presentationml/2006/main" xmlns:r="http://schemas.openxmlformats.org/officeDocument/2006/relationships">
   <p:cSld>
     <p:spTree>
       <p:nvGrpSpPr>
@@ -9575,14 +9529,7 @@
         <p:cNvGrpSpPr/>
         <p:nvPr/>
       </p:nvGrpSpPr>
-      <p:grpSpPr>
-        <a:xfrm>
-          <a:off x="0" y="0"/>
-          <a:ext cx="0" cy="0"/>
-          <a:chOff x="0" y="0"/>
-          <a:chExt cx="0" cy="0"/>
-        </a:xfrm>
-      </p:grpSpPr>
+      <p:grpSpPr/>
       <p:sp>
         <p:nvSpPr>
           <p:cNvPr id="2" name="Rectangle 1"/>
@@ -9623,7 +9570,6 @@
           <a:lstStyle/>
           <a:p>
             <a:pPr algn="ctr"/>
-            <a:endParaRPr/>
           </a:p>
         </p:txBody>
       </p:sp>
@@ -9665,11 +9611,11 @@
           </a:fontRef>
         </p:style>
         <p:txBody>
-          <a:bodyPr wrap="square" lIns="45720" tIns="9144" rIns="45720" bIns="9144" rtlCol="0" anchor="ctr"/>
+          <a:bodyPr rtlCol="0" anchor="ctr" wrap="square" lIns="45720" rIns="45720" tIns="9144" bIns="9144"/>
           <a:lstStyle/>
           <a:p>
             <a:pPr algn="ctr">
-              <a:defRPr sz="950" b="1">
+              <a:defRPr b="1" sz="950">
                 <a:solidFill>
                   <a:srgbClr val="4F46E5"/>
                 </a:solidFill>
@@ -9704,7 +9650,7 @@
           <a:lstStyle/>
           <a:p>
             <a:pPr>
-              <a:defRPr sz="2200" b="1">
+              <a:defRPr b="1" sz="2200">
                 <a:solidFill>
                   <a:srgbClr val="0F172A"/>
                 </a:solidFill>
@@ -9770,7 +9716,6 @@
           <a:lstStyle/>
           <a:p>
             <a:pPr algn="ctr"/>
-            <a:endParaRPr/>
           </a:p>
         </p:txBody>
       </p:sp>
@@ -9797,7 +9742,7 @@
           <a:lstStyle/>
           <a:p>
             <a:pPr>
-              <a:defRPr sz="1300" b="1">
+              <a:defRPr b="1" sz="1300">
                 <a:solidFill>
                   <a:srgbClr val="4F46E5"/>
                 </a:solidFill>
@@ -9837,7 +9782,7 @@
               </a:spcAft>
             </a:pPr>
             <a:r>
-              <a:rPr sz="1100" b="1">
+              <a:rPr b="1" sz="1100">
                 <a:solidFill>
                   <a:srgbClr val="4F46E5"/>
                 </a:solidFill>
@@ -9845,7 +9790,7 @@
               <a:t>•  </a:t>
             </a:r>
             <a:r>
-              <a:rPr sz="1050" b="1">
+              <a:rPr b="1" sz="1050">
                 <a:solidFill>
                   <a:srgbClr val="0F172A"/>
                 </a:solidFill>
@@ -9868,7 +9813,7 @@
               </a:spcAft>
             </a:pPr>
             <a:r>
-              <a:rPr sz="1100" b="1">
+              <a:rPr b="1" sz="1100">
                 <a:solidFill>
                   <a:srgbClr val="4F46E5"/>
                 </a:solidFill>
@@ -9876,7 +9821,7 @@
               <a:t>•  </a:t>
             </a:r>
             <a:r>
-              <a:rPr sz="1050" b="1">
+              <a:rPr b="1" sz="1050">
                 <a:solidFill>
                   <a:srgbClr val="0F172A"/>
                 </a:solidFill>
@@ -9899,7 +9844,7 @@
               </a:spcAft>
             </a:pPr>
             <a:r>
-              <a:rPr sz="1100" b="1">
+              <a:rPr b="1" sz="1100">
                 <a:solidFill>
                   <a:srgbClr val="4F46E5"/>
                 </a:solidFill>
@@ -9907,7 +9852,7 @@
               <a:t>•  </a:t>
             </a:r>
             <a:r>
-              <a:rPr sz="1050" b="1">
+              <a:rPr b="1" sz="1050">
                 <a:solidFill>
                   <a:srgbClr val="0F172A"/>
                 </a:solidFill>
@@ -9930,7 +9875,7 @@
               </a:spcAft>
             </a:pPr>
             <a:r>
-              <a:rPr sz="1100" b="1">
+              <a:rPr b="1" sz="1100">
                 <a:solidFill>
                   <a:srgbClr val="4F46E5"/>
                 </a:solidFill>
@@ -9938,7 +9883,7 @@
               <a:t>•  </a:t>
             </a:r>
             <a:r>
-              <a:rPr sz="1050" b="1">
+              <a:rPr b="1" sz="1050">
                 <a:solidFill>
                   <a:srgbClr val="0F172A"/>
                 </a:solidFill>
@@ -9998,7 +9943,6 @@
           <a:lstStyle/>
           <a:p>
             <a:pPr algn="ctr"/>
-            <a:endParaRPr/>
           </a:p>
         </p:txBody>
       </p:sp>
@@ -10025,7 +9969,7 @@
           <a:lstStyle/>
           <a:p>
             <a:pPr>
-              <a:defRPr sz="1300" b="1">
+              <a:defRPr b="1" sz="1300">
                 <a:solidFill>
                   <a:srgbClr val="D97706"/>
                 </a:solidFill>
@@ -10065,7 +10009,7 @@
               </a:spcAft>
             </a:pPr>
             <a:r>
-              <a:rPr sz="1100" b="1">
+              <a:rPr b="1" sz="1100">
                 <a:solidFill>
                   <a:srgbClr val="D97706"/>
                 </a:solidFill>
@@ -10073,7 +10017,7 @@
               <a:t>•  </a:t>
             </a:r>
             <a:r>
-              <a:rPr sz="1050" b="1">
+              <a:rPr b="1" sz="1050">
                 <a:solidFill>
                   <a:srgbClr val="0F172A"/>
                 </a:solidFill>
@@ -10096,7 +10040,7 @@
               </a:spcAft>
             </a:pPr>
             <a:r>
-              <a:rPr sz="1100" b="1">
+              <a:rPr b="1" sz="1100">
                 <a:solidFill>
                   <a:srgbClr val="D97706"/>
                 </a:solidFill>
@@ -10104,7 +10048,7 @@
               <a:t>•  </a:t>
             </a:r>
             <a:r>
-              <a:rPr sz="1050" b="1">
+              <a:rPr b="1" sz="1050">
                 <a:solidFill>
                   <a:srgbClr val="0F172A"/>
                 </a:solidFill>
@@ -10127,7 +10071,7 @@
               </a:spcAft>
             </a:pPr>
             <a:r>
-              <a:rPr sz="1100" b="1">
+              <a:rPr b="1" sz="1100">
                 <a:solidFill>
                   <a:srgbClr val="D97706"/>
                 </a:solidFill>
@@ -10135,7 +10079,7 @@
               <a:t>•  </a:t>
             </a:r>
             <a:r>
-              <a:rPr sz="1050" b="1">
+              <a:rPr b="1" sz="1050">
                 <a:solidFill>
                   <a:srgbClr val="0F172A"/>
                 </a:solidFill>
@@ -10158,7 +10102,7 @@
               </a:spcAft>
             </a:pPr>
             <a:r>
-              <a:rPr sz="1100" b="1">
+              <a:rPr b="1" sz="1100">
                 <a:solidFill>
                   <a:srgbClr val="D97706"/>
                 </a:solidFill>
@@ -10166,7 +10110,7 @@
               <a:t>•  </a:t>
             </a:r>
             <a:r>
-              <a:rPr sz="1050" b="1">
+              <a:rPr b="1" sz="1050">
                 <a:solidFill>
                   <a:srgbClr val="0F172A"/>
                 </a:solidFill>
@@ -10226,7 +10170,6 @@
           <a:lstStyle/>
           <a:p>
             <a:pPr algn="ctr"/>
-            <a:endParaRPr/>
           </a:p>
         </p:txBody>
       </p:sp>
@@ -10253,7 +10196,7 @@
           <a:lstStyle/>
           <a:p>
             <a:pPr>
-              <a:defRPr sz="1300" b="1">
+              <a:defRPr b="1" sz="1300">
                 <a:solidFill>
                   <a:srgbClr val="E11D48"/>
                 </a:solidFill>
@@ -10293,7 +10236,7 @@
               </a:spcAft>
             </a:pPr>
             <a:r>
-              <a:rPr sz="1100" b="1">
+              <a:rPr b="1" sz="1100">
                 <a:solidFill>
                   <a:srgbClr val="E11D48"/>
                 </a:solidFill>
@@ -10301,7 +10244,7 @@
               <a:t>•  </a:t>
             </a:r>
             <a:r>
-              <a:rPr sz="1050" b="1">
+              <a:rPr b="1" sz="1050">
                 <a:solidFill>
                   <a:srgbClr val="0F172A"/>
                 </a:solidFill>
@@ -10324,7 +10267,7 @@
               </a:spcAft>
             </a:pPr>
             <a:r>
-              <a:rPr sz="1100" b="1">
+              <a:rPr b="1" sz="1100">
                 <a:solidFill>
                   <a:srgbClr val="E11D48"/>
                 </a:solidFill>
@@ -10332,7 +10275,7 @@
               <a:t>•  </a:t>
             </a:r>
             <a:r>
-              <a:rPr sz="1050" b="1">
+              <a:rPr b="1" sz="1050">
                 <a:solidFill>
                   <a:srgbClr val="0F172A"/>
                 </a:solidFill>
@@ -10355,7 +10298,7 @@
               </a:spcAft>
             </a:pPr>
             <a:r>
-              <a:rPr sz="1100" b="1">
+              <a:rPr b="1" sz="1100">
                 <a:solidFill>
                   <a:srgbClr val="E11D48"/>
                 </a:solidFill>
@@ -10363,7 +10306,7 @@
               <a:t>•  </a:t>
             </a:r>
             <a:r>
-              <a:rPr sz="1050" b="1">
+              <a:rPr b="1" sz="1050">
                 <a:solidFill>
                   <a:srgbClr val="0F172A"/>
                 </a:solidFill>
@@ -10386,7 +10329,7 @@
               </a:spcAft>
             </a:pPr>
             <a:r>
-              <a:rPr sz="1100" b="1">
+              <a:rPr b="1" sz="1100">
                 <a:solidFill>
                   <a:srgbClr val="E11D48"/>
                 </a:solidFill>
@@ -10394,7 +10337,7 @@
               <a:t>•  </a:t>
             </a:r>
             <a:r>
-              <a:rPr sz="1050" b="1">
+              <a:rPr b="1" sz="1050">
                 <a:solidFill>
                   <a:srgbClr val="0F172A"/>
                 </a:solidFill>
@@ -10421,7 +10364,7 @@
 </file>
 
 <file path=ppt/slides/slide5.xml><?xml version="1.0" encoding="utf-8"?>
-<p:sld xmlns:a="http://schemas.openxmlformats.org/drawingml/2006/main" xmlns:r="http://schemas.openxmlformats.org/officeDocument/2006/relationships" xmlns:p="http://schemas.openxmlformats.org/presentationml/2006/main">
+<p:sld xmlns:a="http://schemas.openxmlformats.org/drawingml/2006/main" xmlns:p="http://schemas.openxmlformats.org/presentationml/2006/main" xmlns:r="http://schemas.openxmlformats.org/officeDocument/2006/relationships">
   <p:cSld>
     <p:spTree>
       <p:nvGrpSpPr>
@@ -10429,14 +10372,7 @@
         <p:cNvGrpSpPr/>
         <p:nvPr/>
       </p:nvGrpSpPr>
-      <p:grpSpPr>
-        <a:xfrm>
-          <a:off x="0" y="0"/>
-          <a:ext cx="0" cy="0"/>
-          <a:chOff x="0" y="0"/>
-          <a:chExt cx="0" cy="0"/>
-        </a:xfrm>
-      </p:grpSpPr>
+      <p:grpSpPr/>
       <p:sp>
         <p:nvSpPr>
           <p:cNvPr id="2" name="Rectangle 1"/>
@@ -10477,7 +10413,6 @@
           <a:lstStyle/>
           <a:p>
             <a:pPr algn="ctr"/>
-            <a:endParaRPr/>
           </a:p>
         </p:txBody>
       </p:sp>
@@ -10519,11 +10454,11 @@
           </a:fontRef>
         </p:style>
         <p:txBody>
-          <a:bodyPr wrap="square" lIns="45720" tIns="9144" rIns="45720" bIns="9144" rtlCol="0" anchor="ctr"/>
+          <a:bodyPr rtlCol="0" anchor="ctr" wrap="square" lIns="45720" rIns="45720" tIns="9144" bIns="9144"/>
           <a:lstStyle/>
           <a:p>
             <a:pPr algn="ctr">
-              <a:defRPr sz="950" b="1">
+              <a:defRPr b="1" sz="950">
                 <a:solidFill>
                   <a:srgbClr val="4F46E5"/>
                 </a:solidFill>
@@ -10558,7 +10493,7 @@
           <a:lstStyle/>
           <a:p>
             <a:pPr>
-              <a:defRPr sz="2200" b="1">
+              <a:defRPr b="1" sz="2200">
                 <a:solidFill>
                   <a:srgbClr val="0F172A"/>
                 </a:solidFill>
@@ -10624,7 +10559,6 @@
           <a:lstStyle/>
           <a:p>
             <a:pPr algn="ctr"/>
-            <a:endParaRPr/>
           </a:p>
         </p:txBody>
       </p:sp>
@@ -10651,7 +10585,7 @@
           <a:lstStyle/>
           <a:p>
             <a:pPr>
-              <a:defRPr sz="1300" b="1">
+              <a:defRPr b="1" sz="1300">
                 <a:solidFill>
                   <a:srgbClr val="E11D48"/>
                 </a:solidFill>
@@ -10691,7 +10625,7 @@
               </a:spcAft>
             </a:pPr>
             <a:r>
-              <a:rPr sz="1100" b="1">
+              <a:rPr b="1" sz="1100">
                 <a:solidFill>
                   <a:srgbClr val="E11D48"/>
                 </a:solidFill>
@@ -10699,7 +10633,7 @@
               <a:t>•  </a:t>
             </a:r>
             <a:r>
-              <a:rPr sz="1050" b="1">
+              <a:rPr b="1" sz="1050">
                 <a:solidFill>
                   <a:srgbClr val="0F172A"/>
                 </a:solidFill>
@@ -10722,7 +10656,7 @@
               </a:spcAft>
             </a:pPr>
             <a:r>
-              <a:rPr sz="1100" b="1">
+              <a:rPr b="1" sz="1100">
                 <a:solidFill>
                   <a:srgbClr val="E11D48"/>
                 </a:solidFill>
@@ -10730,7 +10664,7 @@
               <a:t>•  </a:t>
             </a:r>
             <a:r>
-              <a:rPr sz="1050" b="1">
+              <a:rPr b="1" sz="1050">
                 <a:solidFill>
                   <a:srgbClr val="0F172A"/>
                 </a:solidFill>
@@ -10753,7 +10687,7 @@
               </a:spcAft>
             </a:pPr>
             <a:r>
-              <a:rPr sz="1100" b="1">
+              <a:rPr b="1" sz="1100">
                 <a:solidFill>
                   <a:srgbClr val="E11D48"/>
                 </a:solidFill>
@@ -10761,7 +10695,7 @@
               <a:t>•  </a:t>
             </a:r>
             <a:r>
-              <a:rPr sz="1050" b="1">
+              <a:rPr b="1" sz="1050">
                 <a:solidFill>
                   <a:srgbClr val="0F172A"/>
                 </a:solidFill>
@@ -10784,7 +10718,7 @@
               </a:spcAft>
             </a:pPr>
             <a:r>
-              <a:rPr sz="1100" b="1">
+              <a:rPr b="1" sz="1100">
                 <a:solidFill>
                   <a:srgbClr val="E11D48"/>
                 </a:solidFill>
@@ -10792,7 +10726,7 @@
               <a:t>•  </a:t>
             </a:r>
             <a:r>
-              <a:rPr sz="1050" b="1">
+              <a:rPr b="1" sz="1050">
                 <a:solidFill>
                   <a:srgbClr val="0F172A"/>
                 </a:solidFill>
@@ -10852,7 +10786,6 @@
           <a:lstStyle/>
           <a:p>
             <a:pPr algn="ctr"/>
-            <a:endParaRPr/>
           </a:p>
         </p:txBody>
       </p:sp>
@@ -10879,7 +10812,7 @@
           <a:lstStyle/>
           <a:p>
             <a:pPr>
-              <a:defRPr sz="1300" b="1">
+              <a:defRPr b="1" sz="1300">
                 <a:solidFill>
                   <a:srgbClr val="4F46E5"/>
                 </a:solidFill>
@@ -10919,7 +10852,7 @@
               </a:spcAft>
             </a:pPr>
             <a:r>
-              <a:rPr sz="1100" b="1">
+              <a:rPr b="1" sz="1100">
                 <a:solidFill>
                   <a:srgbClr val="4F46E5"/>
                 </a:solidFill>
@@ -10927,7 +10860,7 @@
               <a:t>•  </a:t>
             </a:r>
             <a:r>
-              <a:rPr sz="1050" b="1">
+              <a:rPr b="1" sz="1050">
                 <a:solidFill>
                   <a:srgbClr val="0F172A"/>
                 </a:solidFill>
@@ -10950,7 +10883,7 @@
               </a:spcAft>
             </a:pPr>
             <a:r>
-              <a:rPr sz="1100" b="1">
+              <a:rPr b="1" sz="1100">
                 <a:solidFill>
                   <a:srgbClr val="4F46E5"/>
                 </a:solidFill>
@@ -10958,7 +10891,7 @@
               <a:t>•  </a:t>
             </a:r>
             <a:r>
-              <a:rPr sz="1050" b="1">
+              <a:rPr b="1" sz="1050">
                 <a:solidFill>
                   <a:srgbClr val="0F172A"/>
                 </a:solidFill>
@@ -10981,7 +10914,7 @@
               </a:spcAft>
             </a:pPr>
             <a:r>
-              <a:rPr sz="1100" b="1">
+              <a:rPr b="1" sz="1100">
                 <a:solidFill>
                   <a:srgbClr val="4F46E5"/>
                 </a:solidFill>
@@ -10989,7 +10922,7 @@
               <a:t>•  </a:t>
             </a:r>
             <a:r>
-              <a:rPr sz="1050" b="1">
+              <a:rPr b="1" sz="1050">
                 <a:solidFill>
                   <a:srgbClr val="0F172A"/>
                 </a:solidFill>
@@ -11012,7 +10945,7 @@
               </a:spcAft>
             </a:pPr>
             <a:r>
-              <a:rPr sz="1100" b="1">
+              <a:rPr b="1" sz="1100">
                 <a:solidFill>
                   <a:srgbClr val="4F46E5"/>
                 </a:solidFill>
@@ -11020,7 +10953,7 @@
               <a:t>•  </a:t>
             </a:r>
             <a:r>
-              <a:rPr sz="1050" b="1">
+              <a:rPr b="1" sz="1050">
                 <a:solidFill>
                   <a:srgbClr val="0F172A"/>
                 </a:solidFill>
@@ -11047,7 +10980,7 @@
 </file>
 
 <file path=ppt/slides/slide6.xml><?xml version="1.0" encoding="utf-8"?>
-<p:sld xmlns:a="http://schemas.openxmlformats.org/drawingml/2006/main" xmlns:r="http://schemas.openxmlformats.org/officeDocument/2006/relationships" xmlns:p="http://schemas.openxmlformats.org/presentationml/2006/main">
+<p:sld xmlns:a="http://schemas.openxmlformats.org/drawingml/2006/main" xmlns:p="http://schemas.openxmlformats.org/presentationml/2006/main" xmlns:r="http://schemas.openxmlformats.org/officeDocument/2006/relationships">
   <p:cSld>
     <p:spTree>
       <p:nvGrpSpPr>
@@ -11055,14 +10988,7 @@
         <p:cNvGrpSpPr/>
         <p:nvPr/>
       </p:nvGrpSpPr>
-      <p:grpSpPr>
-        <a:xfrm>
-          <a:off x="0" y="0"/>
-          <a:ext cx="0" cy="0"/>
-          <a:chOff x="0" y="0"/>
-          <a:chExt cx="0" cy="0"/>
-        </a:xfrm>
-      </p:grpSpPr>
+      <p:grpSpPr/>
       <p:sp>
         <p:nvSpPr>
           <p:cNvPr id="2" name="Rectangle 1"/>
@@ -11103,7 +11029,6 @@
           <a:lstStyle/>
           <a:p>
             <a:pPr algn="ctr"/>
-            <a:endParaRPr/>
           </a:p>
         </p:txBody>
       </p:sp>
@@ -11145,11 +11070,11 @@
           </a:fontRef>
         </p:style>
         <p:txBody>
-          <a:bodyPr wrap="square" lIns="45720" tIns="9144" rIns="45720" bIns="9144" rtlCol="0" anchor="ctr"/>
+          <a:bodyPr rtlCol="0" anchor="ctr" wrap="square" lIns="45720" rIns="45720" tIns="9144" bIns="9144"/>
           <a:lstStyle/>
           <a:p>
             <a:pPr algn="ctr">
-              <a:defRPr sz="950" b="1">
+              <a:defRPr b="1" sz="950">
                 <a:solidFill>
                   <a:srgbClr val="4F46E5"/>
                 </a:solidFill>
@@ -11184,7 +11109,7 @@
           <a:lstStyle/>
           <a:p>
             <a:pPr>
-              <a:defRPr sz="2200" b="1">
+              <a:defRPr b="1" sz="2200">
                 <a:solidFill>
                   <a:srgbClr val="0F172A"/>
                 </a:solidFill>
@@ -11250,7 +11175,6 @@
           <a:lstStyle/>
           <a:p>
             <a:pPr algn="ctr"/>
-            <a:endParaRPr/>
           </a:p>
         </p:txBody>
       </p:sp>
@@ -11277,7 +11201,7 @@
           <a:lstStyle/>
           <a:p>
             <a:pPr>
-              <a:defRPr sz="1300" b="1">
+              <a:defRPr b="1" sz="1300">
                 <a:solidFill>
                   <a:srgbClr val="4F46E5"/>
                 </a:solidFill>
@@ -11317,7 +11241,7 @@
               </a:spcAft>
             </a:pPr>
             <a:r>
-              <a:rPr sz="1100" b="1">
+              <a:rPr b="1" sz="1100">
                 <a:solidFill>
                   <a:srgbClr val="4F46E5"/>
                 </a:solidFill>
@@ -11325,7 +11249,7 @@
               <a:t>•  </a:t>
             </a:r>
             <a:r>
-              <a:rPr sz="1050" b="1">
+              <a:rPr b="1" sz="1050">
                 <a:solidFill>
                   <a:srgbClr val="0F172A"/>
                 </a:solidFill>
@@ -11348,7 +11272,7 @@
               </a:spcAft>
             </a:pPr>
             <a:r>
-              <a:rPr sz="1100" b="1">
+              <a:rPr b="1" sz="1100">
                 <a:solidFill>
                   <a:srgbClr val="4F46E5"/>
                 </a:solidFill>
@@ -11356,12 +11280,12 @@
               <a:t>•  </a:t>
             </a:r>
             <a:r>
-              <a:rPr sz="1050" b="1">
+              <a:rPr b="1" sz="1050">
                 <a:solidFill>
                   <a:srgbClr val="0F172A"/>
                 </a:solidFill>
               </a:rPr>
-              <a:t>Multi-Companion Voice AI: </a:t>
+              <a:t>100% On-Device Neural TTS: </a:t>
             </a:r>
             <a:r>
               <a:rPr sz="1000">
@@ -11369,7 +11293,7 @@
                   <a:srgbClr val="475569"/>
                 </a:solidFill>
               </a:rPr>
-              <a:t>9 distinct selectable companions (Sparky, Dora, Unni, Meenu, etc.).</a:t>
+              <a:t>Bundled INT8 Piper neural models for English and Malayalam with zero server dependency.</a:t>
             </a:r>
           </a:p>
           <a:p>
@@ -11379,7 +11303,7 @@
               </a:spcAft>
             </a:pPr>
             <a:r>
-              <a:rPr sz="1100" b="1">
+              <a:rPr b="1" sz="1100">
                 <a:solidFill>
                   <a:srgbClr val="4F46E5"/>
                 </a:solidFill>
@@ -11387,12 +11311,12 @@
               <a:t>•  </a:t>
             </a:r>
             <a:r>
-              <a:rPr sz="1050" b="1">
+              <a:rPr b="1" sz="1050">
                 <a:solidFill>
                   <a:srgbClr val="0F172A"/>
                 </a:solidFill>
               </a:rPr>
-              <a:t>Dual-Language Bedtime Stories: </a:t>
+              <a:t>Interactive 3D Simulator: </a:t>
             </a:r>
             <a:r>
               <a:rPr sz="1000">
@@ -11400,7 +11324,7 @@
                   <a:srgbClr val="475569"/>
                 </a:solidFill>
               </a:rPr>
-              <a:t>6 classic English + 6 authentic Malayalam tales with 'Read to Me 🔊'.</a:t>
+              <a:t>Talking Tom kid companion with voice mimicry, touch physics, and snack feeding.</a:t>
             </a:r>
           </a:p>
           <a:p>
@@ -11410,7 +11334,7 @@
               </a:spcAft>
             </a:pPr>
             <a:r>
-              <a:rPr sz="1100" b="1">
+              <a:rPr b="1" sz="1100">
                 <a:solidFill>
                   <a:srgbClr val="4F46E5"/>
                 </a:solidFill>
@@ -11418,7 +11342,7 @@
               <a:t>•  </a:t>
             </a:r>
             <a:r>
-              <a:rPr sz="1050" b="1">
+              <a:rPr b="1" sz="1050">
                 <a:solidFill>
                   <a:srgbClr val="0F172A"/>
                 </a:solidFill>
@@ -11431,7 +11355,7 @@
                   <a:srgbClr val="475569"/>
                 </a:solidFill>
               </a:rPr>
-              <a:t>PIN-secured dashboard with screen-time limits and module switches.</a:t>
+              <a:t>PIN-secured dashboard with screen-time limits (15–60 min) and module switches.</a:t>
             </a:r>
           </a:p>
         </p:txBody>
@@ -11478,7 +11402,6 @@
           <a:lstStyle/>
           <a:p>
             <a:pPr algn="ctr"/>
-            <a:endParaRPr/>
           </a:p>
         </p:txBody>
       </p:sp>
@@ -11505,7 +11428,7 @@
           <a:lstStyle/>
           <a:p>
             <a:pPr>
-              <a:defRPr sz="1300" b="1">
+              <a:defRPr b="1" sz="1300">
                 <a:solidFill>
                   <a:srgbClr val="0D9488"/>
                 </a:solidFill>
@@ -11545,7 +11468,7 @@
               </a:spcAft>
             </a:pPr>
             <a:r>
-              <a:rPr sz="1100" b="1">
+              <a:rPr b="1" sz="1100">
                 <a:solidFill>
                   <a:srgbClr val="0D9488"/>
                 </a:solidFill>
@@ -11553,7 +11476,7 @@
               <a:t>•  </a:t>
             </a:r>
             <a:r>
-              <a:rPr sz="1050" b="1">
+              <a:rPr b="1" sz="1050">
                 <a:solidFill>
                   <a:srgbClr val="0F172A"/>
                 </a:solidFill>
@@ -11566,7 +11489,7 @@
                   <a:srgbClr val="475569"/>
                 </a:solidFill>
               </a:rPr>
-              <a:t>Requires physical card taps and interactive choices to trigger rewards.</a:t>
+              <a:t>Replaces mind-numbing video streams with hands-on touch tasks and companion interaction.</a:t>
             </a:r>
           </a:p>
           <a:p>
@@ -11576,7 +11499,7 @@
               </a:spcAft>
             </a:pPr>
             <a:r>
-              <a:rPr sz="1100" b="1">
+              <a:rPr b="1" sz="1100">
                 <a:solidFill>
                   <a:srgbClr val="0D9488"/>
                 </a:solidFill>
@@ -11584,12 +11507,12 @@
               <a:t>•  </a:t>
             </a:r>
             <a:r>
-              <a:rPr sz="1050" b="1">
+              <a:rPr b="1" sz="1050">
                 <a:solidFill>
                   <a:srgbClr val="0F172A"/>
                 </a:solidFill>
               </a:rPr>
-              <a:t>Humanized Emotion: </a:t>
+              <a:t>Emotional Neural Voice AI: </a:t>
             </a:r>
             <a:r>
               <a:rPr sz="1000">
@@ -11597,7 +11520,7 @@
                   <a:srgbClr val="475569"/>
                 </a:solidFill>
               </a:rPr>
-              <a:t>Pitch-modulated voices with cheerful encouragement replace robotic monotone.</a:t>
+              <a:t>Precompiled C++ ONNX Runtime delivers warm, natural humanized speech locally.</a:t>
             </a:r>
           </a:p>
           <a:p>
@@ -11607,7 +11530,7 @@
               </a:spcAft>
             </a:pPr>
             <a:r>
-              <a:rPr sz="1100" b="1">
+              <a:rPr b="1" sz="1100">
                 <a:solidFill>
                   <a:srgbClr val="0D9488"/>
                 </a:solidFill>
@@ -11615,7 +11538,7 @@
               <a:t>•  </a:t>
             </a:r>
             <a:r>
-              <a:rPr sz="1050" b="1">
+              <a:rPr b="1" sz="1050">
                 <a:solidFill>
                   <a:srgbClr val="0F172A"/>
                 </a:solidFill>
@@ -11638,7 +11561,7 @@
               </a:spcAft>
             </a:pPr>
             <a:r>
-              <a:rPr sz="1100" b="1">
+              <a:rPr b="1" sz="1100">
                 <a:solidFill>
                   <a:srgbClr val="0D9488"/>
                 </a:solidFill>
@@ -11646,7 +11569,7 @@
               <a:t>•  </a:t>
             </a:r>
             <a:r>
-              <a:rPr sz="1050" b="1">
+              <a:rPr b="1" sz="1050">
                 <a:solidFill>
                   <a:srgbClr val="0F172A"/>
                 </a:solidFill>
@@ -11706,7 +11629,6 @@
           <a:lstStyle/>
           <a:p>
             <a:pPr algn="ctr"/>
-            <a:endParaRPr/>
           </a:p>
         </p:txBody>
       </p:sp>
@@ -11733,7 +11655,7 @@
           <a:lstStyle/>
           <a:p>
             <a:pPr>
-              <a:defRPr sz="1300" b="1">
+              <a:defRPr b="1" sz="1300">
                 <a:solidFill>
                   <a:srgbClr val="D97706"/>
                 </a:solidFill>
@@ -11773,7 +11695,7 @@
               </a:spcAft>
             </a:pPr>
             <a:r>
-              <a:rPr sz="1100" b="1">
+              <a:rPr b="1" sz="1100">
                 <a:solidFill>
                   <a:srgbClr val="D97706"/>
                 </a:solidFill>
@@ -11781,12 +11703,12 @@
               <a:t>•  </a:t>
             </a:r>
             <a:r>
-              <a:rPr sz="1050" b="1">
+              <a:rPr b="1" sz="1050">
                 <a:solidFill>
                   <a:srgbClr val="0F172A"/>
                 </a:solidFill>
               </a:rPr>
-              <a:t>100% Ad-Free &amp; Safe: </a:t>
+              <a:t>100% Ad-Free &amp; Offline: </a:t>
             </a:r>
             <a:r>
               <a:rPr sz="1000">
@@ -11794,7 +11716,7 @@
                   <a:srgbClr val="475569"/>
                 </a:solidFill>
               </a:rPr>
-              <a:t>Zero advertisements, zero analytics tracking, and zero hidden payments.</a:t>
+              <a:t>Zero ads, zero tracking, and runs fully on physical hardware with zero internet.</a:t>
             </a:r>
           </a:p>
           <a:p>
@@ -11804,7 +11726,7 @@
               </a:spcAft>
             </a:pPr>
             <a:r>
-              <a:rPr sz="1100" b="1">
+              <a:rPr b="1" sz="1100">
                 <a:solidFill>
                   <a:srgbClr val="D97706"/>
                 </a:solidFill>
@@ -11812,12 +11734,12 @@
               <a:t>•  </a:t>
             </a:r>
             <a:r>
-              <a:rPr sz="1050" b="1">
+              <a:rPr b="1" sz="1050">
                 <a:solidFill>
                   <a:srgbClr val="0F172A"/>
                 </a:solidFill>
               </a:rPr>
-              <a:t>Full Offline Functionality: </a:t>
+              <a:t>Real-Time Voice Caricature: </a:t>
             </a:r>
             <a:r>
               <a:rPr sz="1000">
@@ -11825,7 +11747,7 @@
                   <a:srgbClr val="475569"/>
                 </a:solidFill>
               </a:rPr>
-              <a:t>Entire 54.89 MB app executes locally with zero network latency.</a:t>
+              <a:t>Instant 1.65x pitch modulation for child laughter and phonetic mimicry.</a:t>
             </a:r>
           </a:p>
           <a:p>
@@ -11835,7 +11757,7 @@
               </a:spcAft>
             </a:pPr>
             <a:r>
-              <a:rPr sz="1100" b="1">
+              <a:rPr b="1" sz="1100">
                 <a:solidFill>
                   <a:srgbClr val="D97706"/>
                 </a:solidFill>
@@ -11843,12 +11765,12 @@
               <a:t>•  </a:t>
             </a:r>
             <a:r>
-              <a:rPr sz="1050" b="1">
+              <a:rPr b="1" sz="1050">
                 <a:solidFill>
                   <a:srgbClr val="0F172A"/>
                 </a:solidFill>
               </a:rPr>
-              <a:t>Adaptive TTS Switching: </a:t>
+              <a:t>Zero Cloud Costs: </a:t>
             </a:r>
             <a:r>
               <a:rPr sz="1000">
@@ -11856,7 +11778,7 @@
                   <a:srgbClr val="475569"/>
                 </a:solidFill>
               </a:rPr>
-              <a:t>Automatically switches to native ml-IN voice when reading Malayalam.</a:t>
+              <a:t>Eliminates recurring cloud API billing by running neural inference on device CPU.</a:t>
             </a:r>
           </a:p>
           <a:p>
@@ -11866,7 +11788,7 @@
               </a:spcAft>
             </a:pPr>
             <a:r>
-              <a:rPr sz="1100" b="1">
+              <a:rPr b="1" sz="1100">
                 <a:solidFill>
                   <a:srgbClr val="D97706"/>
                 </a:solidFill>
@@ -11874,7 +11796,7 @@
               <a:t>•  </a:t>
             </a:r>
             <a:r>
-              <a:rPr sz="1050" b="1">
+              <a:rPr b="1" sz="1050">
                 <a:solidFill>
                   <a:srgbClr val="0F172A"/>
                 </a:solidFill>
@@ -11887,7 +11809,7 @@
                   <a:srgbClr val="475569"/>
                 </a:solidFill>
               </a:rPr>
-              <a:t>Fluid 60–120 FPS animations on phones and tablets.</a:t>
+              <a:t>Fluid 60–120 FPS animations on phones and tablets with sub-50ms audio latency.</a:t>
             </a:r>
           </a:p>
         </p:txBody>
@@ -11901,7 +11823,7 @@
 </file>
 
 <file path=ppt/slides/slide7.xml><?xml version="1.0" encoding="utf-8"?>
-<p:sld xmlns:a="http://schemas.openxmlformats.org/drawingml/2006/main" xmlns:r="http://schemas.openxmlformats.org/officeDocument/2006/relationships" xmlns:p="http://schemas.openxmlformats.org/presentationml/2006/main">
+<p:sld xmlns:a="http://schemas.openxmlformats.org/drawingml/2006/main" xmlns:p="http://schemas.openxmlformats.org/presentationml/2006/main" xmlns:r="http://schemas.openxmlformats.org/officeDocument/2006/relationships">
   <p:cSld>
     <p:spTree>
       <p:nvGrpSpPr>
@@ -11909,14 +11831,7 @@
         <p:cNvGrpSpPr/>
         <p:nvPr/>
       </p:nvGrpSpPr>
-      <p:grpSpPr>
-        <a:xfrm>
-          <a:off x="0" y="0"/>
-          <a:ext cx="0" cy="0"/>
-          <a:chOff x="0" y="0"/>
-          <a:chExt cx="0" cy="0"/>
-        </a:xfrm>
-      </p:grpSpPr>
+      <p:grpSpPr/>
       <p:sp>
         <p:nvSpPr>
           <p:cNvPr id="2" name="Rectangle 1"/>
@@ -11957,7 +11872,6 @@
           <a:lstStyle/>
           <a:p>
             <a:pPr algn="ctr"/>
-            <a:endParaRPr/>
           </a:p>
         </p:txBody>
       </p:sp>
@@ -11999,11 +11913,11 @@
           </a:fontRef>
         </p:style>
         <p:txBody>
-          <a:bodyPr wrap="square" lIns="45720" tIns="9144" rIns="45720" bIns="9144" rtlCol="0" anchor="ctr"/>
+          <a:bodyPr rtlCol="0" anchor="ctr" wrap="square" lIns="45720" rIns="45720" tIns="9144" bIns="9144"/>
           <a:lstStyle/>
           <a:p>
             <a:pPr algn="ctr">
-              <a:defRPr sz="950" b="1">
+              <a:defRPr b="1" sz="950">
                 <a:solidFill>
                   <a:srgbClr val="4F46E5"/>
                 </a:solidFill>
@@ -12038,7 +11952,7 @@
           <a:lstStyle/>
           <a:p>
             <a:pPr>
-              <a:defRPr sz="2200" b="1">
+              <a:defRPr b="1" sz="2200">
                 <a:solidFill>
                   <a:srgbClr val="0F172A"/>
                 </a:solidFill>
@@ -12104,7 +12018,6 @@
           <a:lstStyle/>
           <a:p>
             <a:pPr algn="ctr"/>
-            <a:endParaRPr/>
           </a:p>
         </p:txBody>
       </p:sp>
@@ -12131,7 +12044,7 @@
           <a:lstStyle/>
           <a:p>
             <a:pPr>
-              <a:defRPr sz="1300" b="1">
+              <a:defRPr b="1" sz="1300">
                 <a:solidFill>
                   <a:srgbClr val="4F46E5"/>
                 </a:solidFill>
@@ -12171,7 +12084,7 @@
               </a:spcAft>
             </a:pPr>
             <a:r>
-              <a:rPr sz="1100" b="1">
+              <a:rPr b="1" sz="1100">
                 <a:solidFill>
                   <a:srgbClr val="4F46E5"/>
                 </a:solidFill>
@@ -12179,7 +12092,7 @@
               <a:t>•  </a:t>
             </a:r>
             <a:r>
-              <a:rPr sz="1050" b="1">
+              <a:rPr b="1" sz="1050">
                 <a:solidFill>
                   <a:srgbClr val="0F172A"/>
                 </a:solidFill>
@@ -12202,7 +12115,7 @@
               </a:spcAft>
             </a:pPr>
             <a:r>
-              <a:rPr sz="1100" b="1">
+              <a:rPr b="1" sz="1100">
                 <a:solidFill>
                   <a:srgbClr val="4F46E5"/>
                 </a:solidFill>
@@ -12210,7 +12123,7 @@
               <a:t>•  </a:t>
             </a:r>
             <a:r>
-              <a:rPr sz="1050" b="1">
+              <a:rPr b="1" sz="1050">
                 <a:solidFill>
                   <a:srgbClr val="0F172A"/>
                 </a:solidFill>
@@ -12233,7 +12146,7 @@
               </a:spcAft>
             </a:pPr>
             <a:r>
-              <a:rPr sz="1100" b="1">
+              <a:rPr b="1" sz="1100">
                 <a:solidFill>
                   <a:srgbClr val="4F46E5"/>
                 </a:solidFill>
@@ -12241,7 +12154,7 @@
               <a:t>•  </a:t>
             </a:r>
             <a:r>
-              <a:rPr sz="1050" b="1">
+              <a:rPr b="1" sz="1050">
                 <a:solidFill>
                   <a:srgbClr val="0F172A"/>
                 </a:solidFill>
@@ -12264,7 +12177,7 @@
               </a:spcAft>
             </a:pPr>
             <a:r>
-              <a:rPr sz="1100" b="1">
+              <a:rPr b="1" sz="1100">
                 <a:solidFill>
                   <a:srgbClr val="4F46E5"/>
                 </a:solidFill>
@@ -12272,7 +12185,7 @@
               <a:t>•  </a:t>
             </a:r>
             <a:r>
-              <a:rPr sz="1050" b="1">
+              <a:rPr b="1" sz="1050">
                 <a:solidFill>
                   <a:srgbClr val="0F172A"/>
                 </a:solidFill>
@@ -12332,7 +12245,6 @@
           <a:lstStyle/>
           <a:p>
             <a:pPr algn="ctr"/>
-            <a:endParaRPr/>
           </a:p>
         </p:txBody>
       </p:sp>
@@ -12359,7 +12271,7 @@
           <a:lstStyle/>
           <a:p>
             <a:pPr>
-              <a:defRPr sz="1300" b="1">
+              <a:defRPr b="1" sz="1300">
                 <a:solidFill>
                   <a:srgbClr val="0D9488"/>
                 </a:solidFill>
@@ -12399,7 +12311,7 @@
               </a:spcAft>
             </a:pPr>
             <a:r>
-              <a:rPr sz="1100" b="1">
+              <a:rPr b="1" sz="1100">
                 <a:solidFill>
                   <a:srgbClr val="0D9488"/>
                 </a:solidFill>
@@ -12407,7 +12319,7 @@
               <a:t>•  </a:t>
             </a:r>
             <a:r>
-              <a:rPr sz="1050" b="1">
+              <a:rPr b="1" sz="1050">
                 <a:solidFill>
                   <a:srgbClr val="0F172A"/>
                 </a:solidFill>
@@ -12430,7 +12342,7 @@
               </a:spcAft>
             </a:pPr>
             <a:r>
-              <a:rPr sz="1100" b="1">
+              <a:rPr b="1" sz="1100">
                 <a:solidFill>
                   <a:srgbClr val="0D9488"/>
                 </a:solidFill>
@@ -12438,7 +12350,7 @@
               <a:t>•  </a:t>
             </a:r>
             <a:r>
-              <a:rPr sz="1050" b="1">
+              <a:rPr b="1" sz="1050">
                 <a:solidFill>
                   <a:srgbClr val="0F172A"/>
                 </a:solidFill>
@@ -12461,7 +12373,7 @@
               </a:spcAft>
             </a:pPr>
             <a:r>
-              <a:rPr sz="1100" b="1">
+              <a:rPr b="1" sz="1100">
                 <a:solidFill>
                   <a:srgbClr val="0D9488"/>
                 </a:solidFill>
@@ -12469,7 +12381,7 @@
               <a:t>•  </a:t>
             </a:r>
             <a:r>
-              <a:rPr sz="1050" b="1">
+              <a:rPr b="1" sz="1050">
                 <a:solidFill>
                   <a:srgbClr val="0F172A"/>
                 </a:solidFill>
@@ -12492,7 +12404,7 @@
               </a:spcAft>
             </a:pPr>
             <a:r>
-              <a:rPr sz="1100" b="1">
+              <a:rPr b="1" sz="1100">
                 <a:solidFill>
                   <a:srgbClr val="0D9488"/>
                 </a:solidFill>
@@ -12500,7 +12412,7 @@
               <a:t>•  </a:t>
             </a:r>
             <a:r>
-              <a:rPr sz="1050" b="1">
+              <a:rPr b="1" sz="1050">
                 <a:solidFill>
                   <a:srgbClr val="0F172A"/>
                 </a:solidFill>
@@ -12560,7 +12472,6 @@
           <a:lstStyle/>
           <a:p>
             <a:pPr algn="ctr"/>
-            <a:endParaRPr/>
           </a:p>
         </p:txBody>
       </p:sp>
@@ -12587,14 +12498,14 @@
           <a:lstStyle/>
           <a:p>
             <a:pPr>
-              <a:defRPr sz="1300" b="1">
+              <a:defRPr b="1" sz="1300">
                 <a:solidFill>
                   <a:srgbClr val="D97706"/>
                 </a:solidFill>
               </a:defRPr>
             </a:pPr>
             <a:r>
-              <a:t>Audio &amp; Voice AI</a:t>
+              <a:t>Neural Audio &amp; Voice AI</a:t>
             </a:r>
           </a:p>
         </p:txBody>
@@ -12627,7 +12538,7 @@
               </a:spcAft>
             </a:pPr>
             <a:r>
-              <a:rPr sz="1100" b="1">
+              <a:rPr b="1" sz="1100">
                 <a:solidFill>
                   <a:srgbClr val="D97706"/>
                 </a:solidFill>
@@ -12635,12 +12546,12 @@
               <a:t>•  </a:t>
             </a:r>
             <a:r>
-              <a:rPr sz="1050" b="1">
+              <a:rPr b="1" sz="1050">
                 <a:solidFill>
                   <a:srgbClr val="0F172A"/>
                 </a:solidFill>
               </a:rPr>
-              <a:t>flutter_tts: </a:t>
+              <a:t>sherpa_onnx: </a:t>
             </a:r>
             <a:r>
               <a:rPr sz="1000">
@@ -12648,7 +12559,7 @@
                   <a:srgbClr val="475569"/>
                 </a:solidFill>
               </a:rPr>
-              <a:t>Native Android TextToSpeech engine integration.</a:t>
+              <a:t>High-performance C++ ONNX Runtime compiled for Android (arm64, armv7, x86_64).</a:t>
             </a:r>
           </a:p>
           <a:p>
@@ -12658,7 +12569,7 @@
               </a:spcAft>
             </a:pPr>
             <a:r>
-              <a:rPr sz="1100" b="1">
+              <a:rPr b="1" sz="1100">
                 <a:solidFill>
                   <a:srgbClr val="D97706"/>
                 </a:solidFill>
@@ -12666,12 +12577,12 @@
               <a:t>•  </a:t>
             </a:r>
             <a:r>
-              <a:rPr sz="1050" b="1">
+              <a:rPr b="1" sz="1050">
                 <a:solidFill>
                   <a:srgbClr val="0F172A"/>
                 </a:solidFill>
               </a:rPr>
-              <a:t>Dynamic Pitch/Rate: </a:t>
+              <a:t>Piper INT8 Models: </a:t>
             </a:r>
             <a:r>
               <a:rPr sz="1000">
@@ -12679,7 +12590,7 @@
                   <a:srgbClr val="475569"/>
                 </a:solidFill>
               </a:rPr>
-              <a:t>Pitches 0.92–1.34; speech rates 0.42–0.49.</a:t>
+              <a:t>Bundled quantized neural models for English (Lessac, Amy) and Malayalam (Arjun, Meera).</a:t>
             </a:r>
           </a:p>
           <a:p>
@@ -12689,7 +12600,7 @@
               </a:spcAft>
             </a:pPr>
             <a:r>
-              <a:rPr sz="1100" b="1">
+              <a:rPr b="1" sz="1100">
                 <a:solidFill>
                   <a:srgbClr val="D97706"/>
                 </a:solidFill>
@@ -12697,12 +12608,12 @@
               <a:t>•  </a:t>
             </a:r>
             <a:r>
-              <a:rPr sz="1050" b="1">
+              <a:rPr b="1" sz="1050">
                 <a:solidFill>
                   <a:srgbClr val="0F172A"/>
                 </a:solidFill>
               </a:rPr>
-              <a:t>audioplayers: </a:t>
+              <a:t>audioplayers &amp; DSP: </a:t>
             </a:r>
             <a:r>
               <a:rPr sz="1000">
@@ -12710,7 +12621,7 @@
                   <a:srgbClr val="475569"/>
                 </a:solidFill>
               </a:rPr>
-              <a:t>Asynchronous tactile chimes and celebration fanfares.</a:t>
+              <a:t>Real-time 16-bit PCM WAV playback with 1.65x pitch caricature shifting.</a:t>
             </a:r>
           </a:p>
           <a:p>
@@ -12720,7 +12631,7 @@
               </a:spcAft>
             </a:pPr>
             <a:r>
-              <a:rPr sz="1100" b="1">
+              <a:rPr b="1" sz="1100">
                 <a:solidFill>
                   <a:srgbClr val="D97706"/>
                 </a:solidFill>
@@ -12728,12 +12639,12 @@
               <a:t>•  </a:t>
             </a:r>
             <a:r>
-              <a:rPr sz="1050" b="1">
+              <a:rPr b="1" sz="1050">
                 <a:solidFill>
                   <a:srgbClr val="0F172A"/>
                 </a:solidFill>
               </a:rPr>
-              <a:t>Bilingual Routing: </a:t>
+              <a:t>espeak-ng Phonetics: </a:t>
             </a:r>
             <a:r>
               <a:rPr sz="1000">
@@ -12741,7 +12652,7 @@
                   <a:srgbClr val="475569"/>
                 </a:solidFill>
               </a:rPr>
-              <a:t>Instant switching between en-US and ml-IN.</a:t>
+              <a:t>Shared phoneme tables extracted to local storage on first launch.</a:t>
             </a:r>
           </a:p>
         </p:txBody>
@@ -12788,7 +12699,6 @@
           <a:lstStyle/>
           <a:p>
             <a:pPr algn="ctr"/>
-            <a:endParaRPr/>
           </a:p>
         </p:txBody>
       </p:sp>
@@ -12815,7 +12725,7 @@
           <a:lstStyle/>
           <a:p>
             <a:pPr>
-              <a:defRPr sz="1300" b="1">
+              <a:defRPr b="1" sz="1300">
                 <a:solidFill>
                   <a:srgbClr val="E11D48"/>
                 </a:solidFill>
@@ -12855,7 +12765,7 @@
               </a:spcAft>
             </a:pPr>
             <a:r>
-              <a:rPr sz="1100" b="1">
+              <a:rPr b="1" sz="1100">
                 <a:solidFill>
                   <a:srgbClr val="E11D48"/>
                 </a:solidFill>
@@ -12863,7 +12773,7 @@
               <a:t>•  </a:t>
             </a:r>
             <a:r>
-              <a:rPr sz="1050" b="1">
+              <a:rPr b="1" sz="1050">
                 <a:solidFill>
                   <a:srgbClr val="0F172A"/>
                 </a:solidFill>
@@ -12876,7 +12786,7 @@
                   <a:srgbClr val="475569"/>
                 </a:solidFill>
               </a:rPr>
-              <a:t>Local key-value and structured cache engine.</a:t>
+              <a:t>Local key-value and structured cache engine for stats.</a:t>
             </a:r>
           </a:p>
           <a:p>
@@ -12886,7 +12796,7 @@
               </a:spcAft>
             </a:pPr>
             <a:r>
-              <a:rPr sz="1100" b="1">
+              <a:rPr b="1" sz="1100">
                 <a:solidFill>
                   <a:srgbClr val="E11D48"/>
                 </a:solidFill>
@@ -12894,7 +12804,7 @@
               <a:t>•  </a:t>
             </a:r>
             <a:r>
-              <a:rPr sz="1050" b="1">
+              <a:rPr b="1" sz="1050">
                 <a:solidFill>
                   <a:srgbClr val="0F172A"/>
                 </a:solidFill>
@@ -12907,7 +12817,7 @@
                   <a:srgbClr val="475569"/>
                 </a:solidFill>
               </a:rPr>
-              <a:t>Fast atomic local reads/writes without internet.</a:t>
+              <a:t>Fast atomic local reads/writes without network latency.</a:t>
             </a:r>
           </a:p>
           <a:p>
@@ -12917,7 +12827,7 @@
               </a:spcAft>
             </a:pPr>
             <a:r>
-              <a:rPr sz="1100" b="1">
+              <a:rPr b="1" sz="1100">
                 <a:solidFill>
                   <a:srgbClr val="E11D48"/>
                 </a:solidFill>
@@ -12925,7 +12835,7 @@
               <a:t>•  </a:t>
             </a:r>
             <a:r>
-              <a:rPr sz="1050" b="1">
+              <a:rPr b="1" sz="1050">
                 <a:solidFill>
                   <a:srgbClr val="0F172A"/>
                 </a:solidFill>
@@ -12948,7 +12858,7 @@
               </a:spcAft>
             </a:pPr>
             <a:r>
-              <a:rPr sz="1100" b="1">
+              <a:rPr b="1" sz="1100">
                 <a:solidFill>
                   <a:srgbClr val="E11D48"/>
                 </a:solidFill>
@@ -12956,7 +12866,7 @@
               <a:t>•  </a:t>
             </a:r>
             <a:r>
-              <a:rPr sz="1050" b="1">
+              <a:rPr b="1" sz="1050">
                 <a:solidFill>
                   <a:srgbClr val="0F172A"/>
                 </a:solidFill>
@@ -12983,7 +12893,7 @@
 </file>
 
 <file path=ppt/slides/slide8.xml><?xml version="1.0" encoding="utf-8"?>
-<p:sld xmlns:a="http://schemas.openxmlformats.org/drawingml/2006/main" xmlns:r="http://schemas.openxmlformats.org/officeDocument/2006/relationships" xmlns:p="http://schemas.openxmlformats.org/presentationml/2006/main">
+<p:sld xmlns:a="http://schemas.openxmlformats.org/drawingml/2006/main" xmlns:p="http://schemas.openxmlformats.org/presentationml/2006/main" xmlns:r="http://schemas.openxmlformats.org/officeDocument/2006/relationships">
   <p:cSld>
     <p:spTree>
       <p:nvGrpSpPr>
@@ -12991,14 +12901,7 @@
         <p:cNvGrpSpPr/>
         <p:nvPr/>
       </p:nvGrpSpPr>
-      <p:grpSpPr>
-        <a:xfrm>
-          <a:off x="0" y="0"/>
-          <a:ext cx="0" cy="0"/>
-          <a:chOff x="0" y="0"/>
-          <a:chExt cx="0" cy="0"/>
-        </a:xfrm>
-      </p:grpSpPr>
+      <p:grpSpPr/>
       <p:sp>
         <p:nvSpPr>
           <p:cNvPr id="2" name="Rectangle 1"/>
@@ -13039,7 +12942,6 @@
           <a:lstStyle/>
           <a:p>
             <a:pPr algn="ctr"/>
-            <a:endParaRPr/>
           </a:p>
         </p:txBody>
       </p:sp>
@@ -13081,11 +12983,11 @@
           </a:fontRef>
         </p:style>
         <p:txBody>
-          <a:bodyPr wrap="square" lIns="45720" tIns="9144" rIns="45720" bIns="9144" rtlCol="0" anchor="ctr"/>
+          <a:bodyPr rtlCol="0" anchor="ctr" wrap="square" lIns="45720" rIns="45720" tIns="9144" bIns="9144"/>
           <a:lstStyle/>
           <a:p>
             <a:pPr algn="ctr">
-              <a:defRPr sz="950" b="1">
+              <a:defRPr b="1" sz="950">
                 <a:solidFill>
                   <a:srgbClr val="4F46E5"/>
                 </a:solidFill>
@@ -13120,7 +13022,7 @@
           <a:lstStyle/>
           <a:p>
             <a:pPr>
-              <a:defRPr sz="2200" b="1">
+              <a:defRPr b="1" sz="2200">
                 <a:solidFill>
                   <a:srgbClr val="0F172A"/>
                 </a:solidFill>
@@ -13186,7 +13088,6 @@
           <a:lstStyle/>
           <a:p>
             <a:pPr algn="ctr"/>
-            <a:endParaRPr/>
           </a:p>
         </p:txBody>
       </p:sp>
@@ -13213,7 +13114,7 @@
           <a:lstStyle/>
           <a:p>
             <a:pPr>
-              <a:defRPr sz="1300" b="1">
+              <a:defRPr b="1" sz="1300">
                 <a:solidFill>
                   <a:srgbClr val="4F46E5"/>
                 </a:solidFill>
@@ -13246,9 +13147,7 @@
             <a:spAutoFit/>
           </a:bodyPr>
           <a:lstStyle/>
-          <a:p>
-            <a:endParaRPr/>
-          </a:p>
+          <a:p/>
         </p:txBody>
       </p:sp>
       <p:sp>
@@ -13279,7 +13178,7 @@
               </a:spcAft>
             </a:pPr>
             <a:r>
-              <a:rPr sz="1100" b="1">
+              <a:rPr b="1" sz="1100">
                 <a:solidFill>
                   <a:srgbClr val="4F46E5"/>
                 </a:solidFill>
@@ -13293,7 +13192,7 @@
                   <a:srgbClr val="475569"/>
                 </a:solidFill>
               </a:rPr>
-              <a:t>Navigation Shell, Early Learning Modules, Bedtime Stories Reader, Parent Dashboard.</a:t>
+              <a:t>Navigation Shell, Early Learning Modules, 3D Virtual Simulator, Bedtime Stories Reader, Parent Dashboard.</a:t>
             </a:r>
           </a:p>
           <a:p>
@@ -13303,7 +13202,7 @@
               </a:spcAft>
             </a:pPr>
             <a:r>
-              <a:rPr sz="1100" b="1">
+              <a:rPr b="1" sz="1100">
                 <a:solidFill>
                   <a:srgbClr val="4F46E5"/>
                 </a:solidFill>
@@ -13327,7 +13226,7 @@
               </a:spcAft>
             </a:pPr>
             <a:r>
-              <a:rPr sz="1100" b="1">
+              <a:rPr b="1" sz="1100">
                 <a:solidFill>
                   <a:srgbClr val="4F46E5"/>
                 </a:solidFill>
@@ -13341,7 +13240,7 @@
                   <a:srgbClr val="475569"/>
                 </a:solidFill>
               </a:rPr>
-              <a:t>ModularTtsService (voice personas &amp; script detection), SoundFxService (chimes), StorageService.</a:t>
+              <a:t>PiperTtsService (ONNX inference &amp; pitch DSP), SoundFxService (chimes), StorageService.</a:t>
             </a:r>
           </a:p>
           <a:p>
@@ -13351,7 +13250,7 @@
               </a:spcAft>
             </a:pPr>
             <a:r>
-              <a:rPr sz="1100" b="1">
+              <a:rPr b="1" sz="1100">
                 <a:solidFill>
                   <a:srgbClr val="4F46E5"/>
                 </a:solidFill>
@@ -13365,7 +13264,7 @@
                   <a:srgbClr val="475569"/>
                 </a:solidFill>
               </a:rPr>
-              <a:t>Android OS, Native TTS Engine (Google Speech Services), Flash Storage (SharedPrefs XML).</a:t>
+              <a:t>Android OS, Native C++ ONNX Runtime (libonnxruntime.so), Flash Storage (SharedPrefs XML).</a:t>
             </a:r>
           </a:p>
         </p:txBody>
@@ -13412,7 +13311,6 @@
           <a:lstStyle/>
           <a:p>
             <a:pPr algn="ctr"/>
-            <a:endParaRPr/>
           </a:p>
         </p:txBody>
       </p:sp>
@@ -13439,7 +13337,7 @@
           <a:lstStyle/>
           <a:p>
             <a:pPr>
-              <a:defRPr sz="1300" b="1">
+              <a:defRPr b="1" sz="1300">
                 <a:solidFill>
                   <a:srgbClr val="0D9488"/>
                 </a:solidFill>
@@ -13479,7 +13377,7 @@
               </a:spcAft>
             </a:pPr>
             <a:r>
-              <a:rPr sz="1100" b="1">
+              <a:rPr b="1" sz="1100">
                 <a:solidFill>
                   <a:srgbClr val="0D9488"/>
                 </a:solidFill>
@@ -13487,7 +13385,7 @@
               <a:t>•  </a:t>
             </a:r>
             <a:r>
-              <a:rPr sz="1050" b="1">
+              <a:rPr b="1" sz="1050">
                 <a:solidFill>
                   <a:srgbClr val="0F172A"/>
                 </a:solidFill>
@@ -13510,7 +13408,7 @@
               </a:spcAft>
             </a:pPr>
             <a:r>
-              <a:rPr sz="1100" b="1">
+              <a:rPr b="1" sz="1100">
                 <a:solidFill>
                   <a:srgbClr val="0D9488"/>
                 </a:solidFill>
@@ -13518,7 +13416,7 @@
               <a:t>•  </a:t>
             </a:r>
             <a:r>
-              <a:rPr sz="1050" b="1">
+              <a:rPr b="1" sz="1050">
                 <a:solidFill>
                   <a:srgbClr val="0F172A"/>
                 </a:solidFill>
@@ -13541,7 +13439,7 @@
               </a:spcAft>
             </a:pPr>
             <a:r>
-              <a:rPr sz="1100" b="1">
+              <a:rPr b="1" sz="1100">
                 <a:solidFill>
                   <a:srgbClr val="0D9488"/>
                 </a:solidFill>
@@ -13549,7 +13447,7 @@
               <a:t>•  </a:t>
             </a:r>
             <a:r>
-              <a:rPr sz="1050" b="1">
+              <a:rPr b="1" sz="1050">
                 <a:solidFill>
                   <a:srgbClr val="0F172A"/>
                 </a:solidFill>
@@ -13572,7 +13470,7 @@
               </a:spcAft>
             </a:pPr>
             <a:r>
-              <a:rPr sz="1100" b="1">
+              <a:rPr b="1" sz="1100">
                 <a:solidFill>
                   <a:srgbClr val="0D9488"/>
                 </a:solidFill>
@@ -13580,7 +13478,7 @@
               <a:t>•  </a:t>
             </a:r>
             <a:r>
-              <a:rPr sz="1050" b="1">
+              <a:rPr b="1" sz="1050">
                 <a:solidFill>
                   <a:srgbClr val="0F172A"/>
                 </a:solidFill>
@@ -13603,7 +13501,7 @@
               </a:spcAft>
             </a:pPr>
             <a:r>
-              <a:rPr sz="1100" b="1">
+              <a:rPr b="1" sz="1100">
                 <a:solidFill>
                   <a:srgbClr val="0D9488"/>
                 </a:solidFill>
@@ -13611,7 +13509,7 @@
               <a:t>•  </a:t>
             </a:r>
             <a:r>
-              <a:rPr sz="1050" b="1">
+              <a:rPr b="1" sz="1050">
                 <a:solidFill>
                   <a:srgbClr val="0F172A"/>
                 </a:solidFill>
@@ -13634,7 +13532,7 @@
               </a:spcAft>
             </a:pPr>
             <a:r>
-              <a:rPr sz="1100" b="1">
+              <a:rPr b="1" sz="1100">
                 <a:solidFill>
                   <a:srgbClr val="0D9488"/>
                 </a:solidFill>
@@ -13642,7 +13540,7 @@
               <a:t>•  </a:t>
             </a:r>
             <a:r>
-              <a:rPr sz="1050" b="1">
+              <a:rPr b="1" sz="1050">
                 <a:solidFill>
                   <a:srgbClr val="0F172A"/>
                 </a:solidFill>
@@ -13669,7 +13567,7 @@
 </file>
 
 <file path=ppt/slides/slide9.xml><?xml version="1.0" encoding="utf-8"?>
-<p:sld xmlns:a="http://schemas.openxmlformats.org/drawingml/2006/main" xmlns:r="http://schemas.openxmlformats.org/officeDocument/2006/relationships" xmlns:p="http://schemas.openxmlformats.org/presentationml/2006/main">
+<p:sld xmlns:a="http://schemas.openxmlformats.org/drawingml/2006/main" xmlns:p="http://schemas.openxmlformats.org/presentationml/2006/main" xmlns:r="http://schemas.openxmlformats.org/officeDocument/2006/relationships">
   <p:cSld>
     <p:spTree>
       <p:nvGrpSpPr>
@@ -13677,14 +13575,7 @@
         <p:cNvGrpSpPr/>
         <p:nvPr/>
       </p:nvGrpSpPr>
-      <p:grpSpPr>
-        <a:xfrm>
-          <a:off x="0" y="0"/>
-          <a:ext cx="0" cy="0"/>
-          <a:chOff x="0" y="0"/>
-          <a:chExt cx="0" cy="0"/>
-        </a:xfrm>
-      </p:grpSpPr>
+      <p:grpSpPr/>
       <p:sp>
         <p:nvSpPr>
           <p:cNvPr id="2" name="Rectangle 1"/>
@@ -13725,7 +13616,6 @@
           <a:lstStyle/>
           <a:p>
             <a:pPr algn="ctr"/>
-            <a:endParaRPr/>
           </a:p>
         </p:txBody>
       </p:sp>
@@ -13737,7 +13627,7 @@
         </p:nvSpPr>
         <p:spPr>
           <a:xfrm>
-            <a:off x="731520" y="259080"/>
+            <a:off x="731520" y="457200"/>
             <a:ext cx="1645920" cy="256032"/>
           </a:xfrm>
           <a:prstGeom prst="roundRect">
@@ -13767,11 +13657,11 @@
           </a:fontRef>
         </p:style>
         <p:txBody>
-          <a:bodyPr wrap="square" lIns="45720" tIns="9144" rIns="45720" bIns="9144" rtlCol="0" anchor="ctr"/>
+          <a:bodyPr rtlCol="0" anchor="ctr" wrap="square" lIns="45720" rIns="45720" tIns="9144" bIns="9144"/>
           <a:lstStyle/>
           <a:p>
             <a:pPr algn="ctr">
-              <a:defRPr sz="950" b="1">
+              <a:defRPr b="1" sz="950">
                 <a:solidFill>
                   <a:srgbClr val="4F46E5"/>
                 </a:solidFill>
@@ -13791,8 +13681,8 @@
         </p:nvSpPr>
         <p:spPr>
           <a:xfrm>
-            <a:off x="731520" y="585216"/>
-            <a:ext cx="10728655" cy="384721"/>
+            <a:off x="731520" y="749808"/>
+            <a:ext cx="10728655" cy="731520"/>
           </a:xfrm>
           <a:prstGeom prst="rect">
             <a:avLst/>
@@ -13806,15 +13696,26 @@
           <a:lstStyle/>
           <a:p>
             <a:pPr>
-              <a:defRPr sz="2200" b="1">
+              <a:defRPr b="1" sz="2200">
                 <a:solidFill>
                   <a:srgbClr val="0F172A"/>
                 </a:solidFill>
               </a:defRPr>
             </a:pPr>
             <a:r>
-              <a:rPr dirty="0"/>
               <a:t>Data Flow Diagram: Level 0 (Context Level)</a:t>
+            </a:r>
+          </a:p>
+          <a:p>
+            <a:pPr>
+              <a:defRPr sz="1100">
+                <a:solidFill>
+                  <a:srgbClr val="475569"/>
+                </a:solidFill>
+              </a:defRPr>
+            </a:pPr>
+            <a:r>
+              <a:t>High-Level System Boundary &amp; Interactions with External Entities</a:t>
             </a:r>
           </a:p>
         </p:txBody>
@@ -13827,8 +13728,8 @@
         </p:nvSpPr>
         <p:spPr>
           <a:xfrm>
-            <a:off x="731520" y="1170432"/>
-            <a:ext cx="10728655" cy="5138928"/>
+            <a:off x="731520" y="1645920"/>
+            <a:ext cx="10728655" cy="4663440"/>
           </a:xfrm>
           <a:prstGeom prst="roundRect">
             <a:avLst/>
@@ -13861,19 +13762,12 @@
           <a:lstStyle/>
           <a:p>
             <a:pPr algn="ctr"/>
-            <a:endParaRPr/>
           </a:p>
         </p:txBody>
       </p:sp>
       <p:pic>
         <p:nvPicPr>
-          <p:cNvPr id="12" name="Picture 11">
-            <a:extLst>
-              <a:ext uri="{FF2B5EF4-FFF2-40B4-BE49-F238E27FC236}">
-                <a16:creationId xmlns:a16="http://schemas.microsoft.com/office/drawing/2014/main" id="{6E1ED7FF-7640-BCD7-D7D6-C7D8545EA40C}"/>
-              </a:ext>
-            </a:extLst>
-          </p:cNvPr>
+          <p:cNvPr id="6" name="Picture 5" descr="dfd_level_0.png"/>
           <p:cNvPicPr>
             <a:picLocks noChangeAspect="1"/>
           </p:cNvPicPr>
@@ -13887,8 +13781,8 @@
         </p:blipFill>
         <p:spPr>
           <a:xfrm>
-            <a:off x="1301115" y="1352331"/>
-            <a:ext cx="9885045" cy="4775129"/>
+            <a:off x="1097280" y="1828800"/>
+            <a:ext cx="9997135" cy="5712649"/>
           </a:xfrm>
           <a:prstGeom prst="rect">
             <a:avLst/>
